--- a/Managing and Running Python Effectively.pptx
+++ b/Managing and Running Python Effectively.pptx
@@ -167,13 +167,37 @@
 <file path=ppt/revisionInfo.xml><?xml version="1.0" encoding="utf-8"?>
 <p1510:revInfo xmlns:a="http://schemas.openxmlformats.org/drawingml/2006/main" xmlns:r="http://schemas.openxmlformats.org/officeDocument/2006/relationships" xmlns:p1510="http://schemas.microsoft.com/office/powerpoint/2015/10/main">
   <p1510:revLst>
-    <p1510:client id="{8C183C37-6B7E-40E2-8547-5D694AB320C7}" v="28" dt="2024-10-25T14:40:48.769"/>
+    <p1510:client id="{C7FF6125-292A-4FB5-8ECD-9E76613B45E0}" v="2" dt="2025-10-24T08:52:02.299"/>
   </p1510:revLst>
 </p1510:revInfo>
 </file>
 
 <file path=ppt/changesInfos/changesInfo1.xml><?xml version="1.0" encoding="utf-8"?>
 <pc:chgInfo xmlns:a="http://schemas.openxmlformats.org/drawingml/2006/main" xmlns:r="http://schemas.openxmlformats.org/officeDocument/2006/relationships" xmlns:ac="http://schemas.microsoft.com/office/drawing/2013/main/command" xmlns:pc="http://schemas.microsoft.com/office/powerpoint/2013/main/command">
+  <pc:docChgLst>
+    <pc:chgData name="Cooling, Chris" userId="6dcf99c9-2ba5-410a-8445-0893a3d1421f" providerId="ADAL" clId="{C7FF6125-292A-4FB5-8ECD-9E76613B45E0}"/>
+    <pc:docChg chg="modSld">
+      <pc:chgData name="Cooling, Chris" userId="6dcf99c9-2ba5-410a-8445-0893a3d1421f" providerId="ADAL" clId="{C7FF6125-292A-4FB5-8ECD-9E76613B45E0}" dt="2025-10-24T08:52:02.294" v="1" actId="20577"/>
+      <pc:docMkLst>
+        <pc:docMk/>
+      </pc:docMkLst>
+      <pc:sldChg chg="modSp mod">
+        <pc:chgData name="Cooling, Chris" userId="6dcf99c9-2ba5-410a-8445-0893a3d1421f" providerId="ADAL" clId="{C7FF6125-292A-4FB5-8ECD-9E76613B45E0}" dt="2025-10-24T08:52:02.294" v="1" actId="20577"/>
+        <pc:sldMkLst>
+          <pc:docMk/>
+          <pc:sldMk cId="1507190070" sldId="359"/>
+        </pc:sldMkLst>
+        <pc:spChg chg="mod">
+          <ac:chgData name="Cooling, Chris" userId="6dcf99c9-2ba5-410a-8445-0893a3d1421f" providerId="ADAL" clId="{C7FF6125-292A-4FB5-8ECD-9E76613B45E0}" dt="2025-10-24T08:52:02.294" v="1" actId="20577"/>
+          <ac:spMkLst>
+            <pc:docMk/>
+            <pc:sldMk cId="1507190070" sldId="359"/>
+            <ac:spMk id="6" creationId="{F67B57BE-29B8-B7BA-15CB-930F83F6EB26}"/>
+          </ac:spMkLst>
+        </pc:spChg>
+      </pc:sldChg>
+    </pc:docChg>
+  </pc:docChgLst>
   <pc:docChgLst>
     <pc:chgData name="Cooling, Chris" userId="6dcf99c9-2ba5-410a-8445-0893a3d1421f" providerId="ADAL" clId="{8C183C37-6B7E-40E2-8547-5D694AB320C7}"/>
     <pc:docChg chg="undo custSel addSld delSld modSld sldOrd">
@@ -194,22 +218,6 @@
           <pc:docMk/>
           <pc:sldMk cId="3528320225" sldId="325"/>
         </pc:sldMkLst>
-        <pc:spChg chg="mod">
-          <ac:chgData name="Cooling, Chris" userId="6dcf99c9-2ba5-410a-8445-0893a3d1421f" providerId="ADAL" clId="{8C183C37-6B7E-40E2-8547-5D694AB320C7}" dt="2024-10-25T13:47:35.919" v="40" actId="20577"/>
-          <ac:spMkLst>
-            <pc:docMk/>
-            <pc:sldMk cId="3528320225" sldId="325"/>
-            <ac:spMk id="2" creationId="{2C63C0BA-CA37-DEB8-790F-7E3E6CE2E963}"/>
-          </ac:spMkLst>
-        </pc:spChg>
-        <pc:spChg chg="mod">
-          <ac:chgData name="Cooling, Chris" userId="6dcf99c9-2ba5-410a-8445-0893a3d1421f" providerId="ADAL" clId="{8C183C37-6B7E-40E2-8547-5D694AB320C7}" dt="2024-10-29T14:11:17.108" v="415" actId="20577"/>
-          <ac:spMkLst>
-            <pc:docMk/>
-            <pc:sldMk cId="3528320225" sldId="325"/>
-            <ac:spMk id="3" creationId="{F5563428-ABDB-D4AE-2088-152ADB16C28C}"/>
-          </ac:spMkLst>
-        </pc:spChg>
       </pc:sldChg>
       <pc:sldChg chg="modSp add mod">
         <pc:chgData name="Cooling, Chris" userId="6dcf99c9-2ba5-410a-8445-0893a3d1421f" providerId="ADAL" clId="{8C183C37-6B7E-40E2-8547-5D694AB320C7}" dt="2024-10-25T13:50:47.316" v="74" actId="1076"/>
@@ -217,14 +225,6 @@
           <pc:docMk/>
           <pc:sldMk cId="3685198326" sldId="332"/>
         </pc:sldMkLst>
-        <pc:spChg chg="mod">
-          <ac:chgData name="Cooling, Chris" userId="6dcf99c9-2ba5-410a-8445-0893a3d1421f" providerId="ADAL" clId="{8C183C37-6B7E-40E2-8547-5D694AB320C7}" dt="2024-10-25T13:50:47.316" v="74" actId="1076"/>
-          <ac:spMkLst>
-            <pc:docMk/>
-            <pc:sldMk cId="3685198326" sldId="332"/>
-            <ac:spMk id="5" creationId="{E4E00C91-8C74-2520-0550-3F7A4F5743AC}"/>
-          </ac:spMkLst>
-        </pc:spChg>
       </pc:sldChg>
       <pc:sldChg chg="modSp mod">
         <pc:chgData name="Cooling, Chris" userId="6dcf99c9-2ba5-410a-8445-0893a3d1421f" providerId="ADAL" clId="{8C183C37-6B7E-40E2-8547-5D694AB320C7}" dt="2024-10-25T13:48:21.273" v="42" actId="12"/>
@@ -232,14 +232,6 @@
           <pc:docMk/>
           <pc:sldMk cId="16407505" sldId="361"/>
         </pc:sldMkLst>
-        <pc:spChg chg="mod">
-          <ac:chgData name="Cooling, Chris" userId="6dcf99c9-2ba5-410a-8445-0893a3d1421f" providerId="ADAL" clId="{8C183C37-6B7E-40E2-8547-5D694AB320C7}" dt="2024-10-25T13:48:21.273" v="42" actId="12"/>
-          <ac:spMkLst>
-            <pc:docMk/>
-            <pc:sldMk cId="16407505" sldId="361"/>
-            <ac:spMk id="3" creationId="{3059243C-26C4-B42B-1D89-75DB3A5CA945}"/>
-          </ac:spMkLst>
-        </pc:spChg>
       </pc:sldChg>
       <pc:sldChg chg="del ord modNotesTx">
         <pc:chgData name="Cooling, Chris" userId="6dcf99c9-2ba5-410a-8445-0893a3d1421f" providerId="ADAL" clId="{8C183C37-6B7E-40E2-8547-5D694AB320C7}" dt="2024-10-25T15:10:47.436" v="363" actId="2696"/>
@@ -261,22 +253,6 @@
           <pc:docMk/>
           <pc:sldMk cId="2358774407" sldId="409"/>
         </pc:sldMkLst>
-        <pc:spChg chg="mod">
-          <ac:chgData name="Cooling, Chris" userId="6dcf99c9-2ba5-410a-8445-0893a3d1421f" providerId="ADAL" clId="{8C183C37-6B7E-40E2-8547-5D694AB320C7}" dt="2024-10-25T13:51:18.865" v="80"/>
-          <ac:spMkLst>
-            <pc:docMk/>
-            <pc:sldMk cId="2358774407" sldId="409"/>
-            <ac:spMk id="2" creationId="{6F5D226D-AEEE-9CAD-EC6D-58B1E3EBB257}"/>
-          </ac:spMkLst>
-        </pc:spChg>
-        <pc:spChg chg="mod">
-          <ac:chgData name="Cooling, Chris" userId="6dcf99c9-2ba5-410a-8445-0893a3d1421f" providerId="ADAL" clId="{8C183C37-6B7E-40E2-8547-5D694AB320C7}" dt="2024-10-25T13:51:45.646" v="85" actId="15"/>
-          <ac:spMkLst>
-            <pc:docMk/>
-            <pc:sldMk cId="2358774407" sldId="409"/>
-            <ac:spMk id="3" creationId="{AE72B19A-BAEF-7DAE-DDC1-54394DA86691}"/>
-          </ac:spMkLst>
-        </pc:spChg>
       </pc:sldChg>
       <pc:sldChg chg="modSp add mod modNotesTx">
         <pc:chgData name="Cooling, Chris" userId="6dcf99c9-2ba5-410a-8445-0893a3d1421f" providerId="ADAL" clId="{8C183C37-6B7E-40E2-8547-5D694AB320C7}" dt="2024-10-25T13:53:26.849" v="100"/>
@@ -284,14 +260,6 @@
           <pc:docMk/>
           <pc:sldMk cId="226661273" sldId="410"/>
         </pc:sldMkLst>
-        <pc:spChg chg="mod">
-          <ac:chgData name="Cooling, Chris" userId="6dcf99c9-2ba5-410a-8445-0893a3d1421f" providerId="ADAL" clId="{8C183C37-6B7E-40E2-8547-5D694AB320C7}" dt="2024-10-25T13:53:24.268" v="99"/>
-          <ac:spMkLst>
-            <pc:docMk/>
-            <pc:sldMk cId="226661273" sldId="410"/>
-            <ac:spMk id="3" creationId="{AE72B19A-BAEF-7DAE-DDC1-54394DA86691}"/>
-          </ac:spMkLst>
-        </pc:spChg>
       </pc:sldChg>
       <pc:sldChg chg="modSp add mod modNotesTx">
         <pc:chgData name="Cooling, Chris" userId="6dcf99c9-2ba5-410a-8445-0893a3d1421f" providerId="ADAL" clId="{8C183C37-6B7E-40E2-8547-5D694AB320C7}" dt="2024-10-25T13:54:04.230" v="106"/>
@@ -299,22 +267,6 @@
           <pc:docMk/>
           <pc:sldMk cId="2068907722" sldId="411"/>
         </pc:sldMkLst>
-        <pc:spChg chg="mod">
-          <ac:chgData name="Cooling, Chris" userId="6dcf99c9-2ba5-410a-8445-0893a3d1421f" providerId="ADAL" clId="{8C183C37-6B7E-40E2-8547-5D694AB320C7}" dt="2024-10-25T13:53:43.904" v="102"/>
-          <ac:spMkLst>
-            <pc:docMk/>
-            <pc:sldMk cId="2068907722" sldId="411"/>
-            <ac:spMk id="2" creationId="{6F5D226D-AEEE-9CAD-EC6D-58B1E3EBB257}"/>
-          </ac:spMkLst>
-        </pc:spChg>
-        <pc:spChg chg="mod">
-          <ac:chgData name="Cooling, Chris" userId="6dcf99c9-2ba5-410a-8445-0893a3d1421f" providerId="ADAL" clId="{8C183C37-6B7E-40E2-8547-5D694AB320C7}" dt="2024-10-25T13:53:56.216" v="105" actId="15"/>
-          <ac:spMkLst>
-            <pc:docMk/>
-            <pc:sldMk cId="2068907722" sldId="411"/>
-            <ac:spMk id="3" creationId="{AE72B19A-BAEF-7DAE-DDC1-54394DA86691}"/>
-          </ac:spMkLst>
-        </pc:spChg>
       </pc:sldChg>
       <pc:sldChg chg="modSp add mod modNotesTx">
         <pc:chgData name="Cooling, Chris" userId="6dcf99c9-2ba5-410a-8445-0893a3d1421f" providerId="ADAL" clId="{8C183C37-6B7E-40E2-8547-5D694AB320C7}" dt="2024-10-25T13:54:54.228" v="111"/>
@@ -322,22 +274,6 @@
           <pc:docMk/>
           <pc:sldMk cId="1178621743" sldId="412"/>
         </pc:sldMkLst>
-        <pc:spChg chg="mod">
-          <ac:chgData name="Cooling, Chris" userId="6dcf99c9-2ba5-410a-8445-0893a3d1421f" providerId="ADAL" clId="{8C183C37-6B7E-40E2-8547-5D694AB320C7}" dt="2024-10-25T13:54:40.394" v="108"/>
-          <ac:spMkLst>
-            <pc:docMk/>
-            <pc:sldMk cId="1178621743" sldId="412"/>
-            <ac:spMk id="2" creationId="{6F5D226D-AEEE-9CAD-EC6D-58B1E3EBB257}"/>
-          </ac:spMkLst>
-        </pc:spChg>
-        <pc:spChg chg="mod">
-          <ac:chgData name="Cooling, Chris" userId="6dcf99c9-2ba5-410a-8445-0893a3d1421f" providerId="ADAL" clId="{8C183C37-6B7E-40E2-8547-5D694AB320C7}" dt="2024-10-25T13:54:48.913" v="110" actId="12"/>
-          <ac:spMkLst>
-            <pc:docMk/>
-            <pc:sldMk cId="1178621743" sldId="412"/>
-            <ac:spMk id="3" creationId="{AE72B19A-BAEF-7DAE-DDC1-54394DA86691}"/>
-          </ac:spMkLst>
-        </pc:spChg>
       </pc:sldChg>
       <pc:sldChg chg="addSp delSp modSp add mod modNotesTx">
         <pc:chgData name="Cooling, Chris" userId="6dcf99c9-2ba5-410a-8445-0893a3d1421f" providerId="ADAL" clId="{8C183C37-6B7E-40E2-8547-5D694AB320C7}" dt="2024-10-25T14:00:33.119" v="146"/>
@@ -345,78 +281,6 @@
           <pc:docMk/>
           <pc:sldMk cId="2990836368" sldId="413"/>
         </pc:sldMkLst>
-        <pc:spChg chg="mod">
-          <ac:chgData name="Cooling, Chris" userId="6dcf99c9-2ba5-410a-8445-0893a3d1421f" providerId="ADAL" clId="{8C183C37-6B7E-40E2-8547-5D694AB320C7}" dt="2024-10-25T13:56:20.967" v="114"/>
-          <ac:spMkLst>
-            <pc:docMk/>
-            <pc:sldMk cId="2990836368" sldId="413"/>
-            <ac:spMk id="2" creationId="{6F5D226D-AEEE-9CAD-EC6D-58B1E3EBB257}"/>
-          </ac:spMkLst>
-        </pc:spChg>
-        <pc:spChg chg="mod">
-          <ac:chgData name="Cooling, Chris" userId="6dcf99c9-2ba5-410a-8445-0893a3d1421f" providerId="ADAL" clId="{8C183C37-6B7E-40E2-8547-5D694AB320C7}" dt="2024-10-25T13:57:07.138" v="121" actId="1076"/>
-          <ac:spMkLst>
-            <pc:docMk/>
-            <pc:sldMk cId="2990836368" sldId="413"/>
-            <ac:spMk id="3" creationId="{AE72B19A-BAEF-7DAE-DDC1-54394DA86691}"/>
-          </ac:spMkLst>
-        </pc:spChg>
-        <pc:spChg chg="add mod topLvl">
-          <ac:chgData name="Cooling, Chris" userId="6dcf99c9-2ba5-410a-8445-0893a3d1421f" providerId="ADAL" clId="{8C183C37-6B7E-40E2-8547-5D694AB320C7}" dt="2024-10-25T14:00:22.823" v="145" actId="14100"/>
-          <ac:spMkLst>
-            <pc:docMk/>
-            <pc:sldMk cId="2990836368" sldId="413"/>
-            <ac:spMk id="4" creationId="{166D5E34-201B-53C8-BB70-D88ACB11EC27}"/>
-          </ac:spMkLst>
-        </pc:spChg>
-        <pc:spChg chg="add mod">
-          <ac:chgData name="Cooling, Chris" userId="6dcf99c9-2ba5-410a-8445-0893a3d1421f" providerId="ADAL" clId="{8C183C37-6B7E-40E2-8547-5D694AB320C7}" dt="2024-10-25T14:00:17.546" v="144" actId="14100"/>
-          <ac:spMkLst>
-            <pc:docMk/>
-            <pc:sldMk cId="2990836368" sldId="413"/>
-            <ac:spMk id="10" creationId="{B64B3C4A-91A8-A464-E08F-4620D87ABB49}"/>
-          </ac:spMkLst>
-        </pc:spChg>
-        <pc:grpChg chg="add del mod">
-          <ac:chgData name="Cooling, Chris" userId="6dcf99c9-2ba5-410a-8445-0893a3d1421f" providerId="ADAL" clId="{8C183C37-6B7E-40E2-8547-5D694AB320C7}" dt="2024-10-25T13:59:07.822" v="131" actId="165"/>
-          <ac:grpSpMkLst>
-            <pc:docMk/>
-            <pc:sldMk cId="2990836368" sldId="413"/>
-            <ac:grpSpMk id="9" creationId="{17790B09-E88F-184B-536F-19E489AA4CC7}"/>
-          </ac:grpSpMkLst>
-        </pc:grpChg>
-        <pc:picChg chg="add del mod topLvl">
-          <ac:chgData name="Cooling, Chris" userId="6dcf99c9-2ba5-410a-8445-0893a3d1421f" providerId="ADAL" clId="{8C183C37-6B7E-40E2-8547-5D694AB320C7}" dt="2024-10-25T13:59:16.567" v="133" actId="478"/>
-          <ac:picMkLst>
-            <pc:docMk/>
-            <pc:sldMk cId="2990836368" sldId="413"/>
-            <ac:picMk id="8" creationId="{94B3DF22-166D-3EBF-04F8-13B5B3B89739}"/>
-          </ac:picMkLst>
-        </pc:picChg>
-        <pc:picChg chg="add mod">
-          <ac:chgData name="Cooling, Chris" userId="6dcf99c9-2ba5-410a-8445-0893a3d1421f" providerId="ADAL" clId="{8C183C37-6B7E-40E2-8547-5D694AB320C7}" dt="2024-10-25T13:59:28.592" v="135" actId="1076"/>
-          <ac:picMkLst>
-            <pc:docMk/>
-            <pc:sldMk cId="2990836368" sldId="413"/>
-            <ac:picMk id="11" creationId="{9735BEF6-8C87-6DA8-C8D0-F56F9FF3701B}"/>
-          </ac:picMkLst>
-        </pc:picChg>
-        <pc:picChg chg="add mod">
-          <ac:chgData name="Cooling, Chris" userId="6dcf99c9-2ba5-410a-8445-0893a3d1421f" providerId="ADAL" clId="{8C183C37-6B7E-40E2-8547-5D694AB320C7}" dt="2024-10-25T13:59:51.917" v="140" actId="1076"/>
-          <ac:picMkLst>
-            <pc:docMk/>
-            <pc:sldMk cId="2990836368" sldId="413"/>
-            <ac:picMk id="12" creationId="{A986B5F1-A4DD-796B-DC21-430366903BD4}"/>
-          </ac:picMkLst>
-        </pc:picChg>
-        <pc:picChg chg="add mod">
-          <ac:chgData name="Cooling, Chris" userId="6dcf99c9-2ba5-410a-8445-0893a3d1421f" providerId="ADAL" clId="{8C183C37-6B7E-40E2-8547-5D694AB320C7}" dt="2024-10-25T14:00:03.397" v="142" actId="1076"/>
-          <ac:picMkLst>
-            <pc:docMk/>
-            <pc:sldMk cId="2990836368" sldId="413"/>
-            <ac:picMk id="13" creationId="{7F36F1D5-31CA-6AB1-B757-3F9D7C5C801E}"/>
-          </ac:picMkLst>
-        </pc:picChg>
       </pc:sldChg>
       <pc:sldChg chg="modSp add mod ord modNotesTx">
         <pc:chgData name="Cooling, Chris" userId="6dcf99c9-2ba5-410a-8445-0893a3d1421f" providerId="ADAL" clId="{8C183C37-6B7E-40E2-8547-5D694AB320C7}" dt="2024-10-25T14:01:18.964" v="156"/>
@@ -424,22 +288,6 @@
           <pc:docMk/>
           <pc:sldMk cId="2498874559" sldId="414"/>
         </pc:sldMkLst>
-        <pc:spChg chg="mod">
-          <ac:chgData name="Cooling, Chris" userId="6dcf99c9-2ba5-410a-8445-0893a3d1421f" providerId="ADAL" clId="{8C183C37-6B7E-40E2-8547-5D694AB320C7}" dt="2024-10-25T14:00:51.509" v="150"/>
-          <ac:spMkLst>
-            <pc:docMk/>
-            <pc:sldMk cId="2498874559" sldId="414"/>
-            <ac:spMk id="2" creationId="{6F5D226D-AEEE-9CAD-EC6D-58B1E3EBB257}"/>
-          </ac:spMkLst>
-        </pc:spChg>
-        <pc:spChg chg="mod">
-          <ac:chgData name="Cooling, Chris" userId="6dcf99c9-2ba5-410a-8445-0893a3d1421f" providerId="ADAL" clId="{8C183C37-6B7E-40E2-8547-5D694AB320C7}" dt="2024-10-25T14:01:10.137" v="155" actId="15"/>
-          <ac:spMkLst>
-            <pc:docMk/>
-            <pc:sldMk cId="2498874559" sldId="414"/>
-            <ac:spMk id="3" creationId="{AE72B19A-BAEF-7DAE-DDC1-54394DA86691}"/>
-          </ac:spMkLst>
-        </pc:spChg>
       </pc:sldChg>
       <pc:sldChg chg="modSp add mod modNotesTx">
         <pc:chgData name="Cooling, Chris" userId="6dcf99c9-2ba5-410a-8445-0893a3d1421f" providerId="ADAL" clId="{8C183C37-6B7E-40E2-8547-5D694AB320C7}" dt="2024-10-25T15:15:54.311" v="364"/>
@@ -447,22 +295,6 @@
           <pc:docMk/>
           <pc:sldMk cId="1147531970" sldId="415"/>
         </pc:sldMkLst>
-        <pc:spChg chg="mod">
-          <ac:chgData name="Cooling, Chris" userId="6dcf99c9-2ba5-410a-8445-0893a3d1421f" providerId="ADAL" clId="{8C183C37-6B7E-40E2-8547-5D694AB320C7}" dt="2024-10-25T14:01:41.057" v="158"/>
-          <ac:spMkLst>
-            <pc:docMk/>
-            <pc:sldMk cId="1147531970" sldId="415"/>
-            <ac:spMk id="2" creationId="{6F5D226D-AEEE-9CAD-EC6D-58B1E3EBB257}"/>
-          </ac:spMkLst>
-        </pc:spChg>
-        <pc:spChg chg="mod">
-          <ac:chgData name="Cooling, Chris" userId="6dcf99c9-2ba5-410a-8445-0893a3d1421f" providerId="ADAL" clId="{8C183C37-6B7E-40E2-8547-5D694AB320C7}" dt="2024-10-25T14:01:50.472" v="160" actId="12"/>
-          <ac:spMkLst>
-            <pc:docMk/>
-            <pc:sldMk cId="1147531970" sldId="415"/>
-            <ac:spMk id="3" creationId="{AE72B19A-BAEF-7DAE-DDC1-54394DA86691}"/>
-          </ac:spMkLst>
-        </pc:spChg>
       </pc:sldChg>
       <pc:sldChg chg="modSp add mod modNotesTx">
         <pc:chgData name="Cooling, Chris" userId="6dcf99c9-2ba5-410a-8445-0893a3d1421f" providerId="ADAL" clId="{8C183C37-6B7E-40E2-8547-5D694AB320C7}" dt="2024-10-29T14:10:45.851" v="370" actId="12"/>
@@ -470,22 +302,6 @@
           <pc:docMk/>
           <pc:sldMk cId="3088362139" sldId="416"/>
         </pc:sldMkLst>
-        <pc:spChg chg="mod">
-          <ac:chgData name="Cooling, Chris" userId="6dcf99c9-2ba5-410a-8445-0893a3d1421f" providerId="ADAL" clId="{8C183C37-6B7E-40E2-8547-5D694AB320C7}" dt="2024-10-25T14:02:11.316" v="164" actId="20577"/>
-          <ac:spMkLst>
-            <pc:docMk/>
-            <pc:sldMk cId="3088362139" sldId="416"/>
-            <ac:spMk id="2" creationId="{6F5D226D-AEEE-9CAD-EC6D-58B1E3EBB257}"/>
-          </ac:spMkLst>
-        </pc:spChg>
-        <pc:spChg chg="mod">
-          <ac:chgData name="Cooling, Chris" userId="6dcf99c9-2ba5-410a-8445-0893a3d1421f" providerId="ADAL" clId="{8C183C37-6B7E-40E2-8547-5D694AB320C7}" dt="2024-10-29T14:10:45.851" v="370" actId="12"/>
-          <ac:spMkLst>
-            <pc:docMk/>
-            <pc:sldMk cId="3088362139" sldId="416"/>
-            <ac:spMk id="3" creationId="{AE72B19A-BAEF-7DAE-DDC1-54394DA86691}"/>
-          </ac:spMkLst>
-        </pc:spChg>
       </pc:sldChg>
       <pc:sldChg chg="modSp add mod modNotesTx">
         <pc:chgData name="Cooling, Chris" userId="6dcf99c9-2ba5-410a-8445-0893a3d1421f" providerId="ADAL" clId="{8C183C37-6B7E-40E2-8547-5D694AB320C7}" dt="2024-10-25T14:22:50.197" v="178" actId="12"/>
@@ -493,22 +309,6 @@
           <pc:docMk/>
           <pc:sldMk cId="66260932" sldId="417"/>
         </pc:sldMkLst>
-        <pc:spChg chg="mod">
-          <ac:chgData name="Cooling, Chris" userId="6dcf99c9-2ba5-410a-8445-0893a3d1421f" providerId="ADAL" clId="{8C183C37-6B7E-40E2-8547-5D694AB320C7}" dt="2024-10-25T14:02:44.539" v="168"/>
-          <ac:spMkLst>
-            <pc:docMk/>
-            <pc:sldMk cId="66260932" sldId="417"/>
-            <ac:spMk id="2" creationId="{6F5D226D-AEEE-9CAD-EC6D-58B1E3EBB257}"/>
-          </ac:spMkLst>
-        </pc:spChg>
-        <pc:spChg chg="mod">
-          <ac:chgData name="Cooling, Chris" userId="6dcf99c9-2ba5-410a-8445-0893a3d1421f" providerId="ADAL" clId="{8C183C37-6B7E-40E2-8547-5D694AB320C7}" dt="2024-10-25T14:22:50.197" v="178" actId="12"/>
-          <ac:spMkLst>
-            <pc:docMk/>
-            <pc:sldMk cId="66260932" sldId="417"/>
-            <ac:spMk id="3" creationId="{AE72B19A-BAEF-7DAE-DDC1-54394DA86691}"/>
-          </ac:spMkLst>
-        </pc:spChg>
       </pc:sldChg>
       <pc:sldChg chg="modSp add mod modNotesTx">
         <pc:chgData name="Cooling, Chris" userId="6dcf99c9-2ba5-410a-8445-0893a3d1421f" providerId="ADAL" clId="{8C183C37-6B7E-40E2-8547-5D694AB320C7}" dt="2024-10-25T14:22:38.006" v="177"/>
@@ -516,22 +316,6 @@
           <pc:docMk/>
           <pc:sldMk cId="752139902" sldId="418"/>
         </pc:sldMkLst>
-        <pc:spChg chg="mod">
-          <ac:chgData name="Cooling, Chris" userId="6dcf99c9-2ba5-410a-8445-0893a3d1421f" providerId="ADAL" clId="{8C183C37-6B7E-40E2-8547-5D694AB320C7}" dt="2024-10-25T14:21:42.568" v="172"/>
-          <ac:spMkLst>
-            <pc:docMk/>
-            <pc:sldMk cId="752139902" sldId="418"/>
-            <ac:spMk id="2" creationId="{6F5D226D-AEEE-9CAD-EC6D-58B1E3EBB257}"/>
-          </ac:spMkLst>
-        </pc:spChg>
-        <pc:spChg chg="mod">
-          <ac:chgData name="Cooling, Chris" userId="6dcf99c9-2ba5-410a-8445-0893a3d1421f" providerId="ADAL" clId="{8C183C37-6B7E-40E2-8547-5D694AB320C7}" dt="2024-10-25T14:22:08.504" v="176" actId="15"/>
-          <ac:spMkLst>
-            <pc:docMk/>
-            <pc:sldMk cId="752139902" sldId="418"/>
-            <ac:spMk id="3" creationId="{AE72B19A-BAEF-7DAE-DDC1-54394DA86691}"/>
-          </ac:spMkLst>
-        </pc:spChg>
       </pc:sldChg>
       <pc:sldChg chg="modSp add mod modNotesTx">
         <pc:chgData name="Cooling, Chris" userId="6dcf99c9-2ba5-410a-8445-0893a3d1421f" providerId="ADAL" clId="{8C183C37-6B7E-40E2-8547-5D694AB320C7}" dt="2024-10-25T14:23:33.325" v="182"/>
@@ -539,14 +323,6 @@
           <pc:docMk/>
           <pc:sldMk cId="3326181046" sldId="419"/>
         </pc:sldMkLst>
-        <pc:spChg chg="mod">
-          <ac:chgData name="Cooling, Chris" userId="6dcf99c9-2ba5-410a-8445-0893a3d1421f" providerId="ADAL" clId="{8C183C37-6B7E-40E2-8547-5D694AB320C7}" dt="2024-10-25T14:23:26.492" v="181" actId="12"/>
-          <ac:spMkLst>
-            <pc:docMk/>
-            <pc:sldMk cId="3326181046" sldId="419"/>
-            <ac:spMk id="3" creationId="{AE72B19A-BAEF-7DAE-DDC1-54394DA86691}"/>
-          </ac:spMkLst>
-        </pc:spChg>
       </pc:sldChg>
       <pc:sldChg chg="modSp add mod">
         <pc:chgData name="Cooling, Chris" userId="6dcf99c9-2ba5-410a-8445-0893a3d1421f" providerId="ADAL" clId="{8C183C37-6B7E-40E2-8547-5D694AB320C7}" dt="2024-10-25T14:24:42.103" v="200" actId="20577"/>
@@ -554,14 +330,6 @@
           <pc:docMk/>
           <pc:sldMk cId="3376151040" sldId="420"/>
         </pc:sldMkLst>
-        <pc:spChg chg="mod">
-          <ac:chgData name="Cooling, Chris" userId="6dcf99c9-2ba5-410a-8445-0893a3d1421f" providerId="ADAL" clId="{8C183C37-6B7E-40E2-8547-5D694AB320C7}" dt="2024-10-25T14:24:42.103" v="200" actId="20577"/>
-          <ac:spMkLst>
-            <pc:docMk/>
-            <pc:sldMk cId="3376151040" sldId="420"/>
-            <ac:spMk id="5" creationId="{E4E00C91-8C74-2520-0550-3F7A4F5743AC}"/>
-          </ac:spMkLst>
-        </pc:spChg>
       </pc:sldChg>
       <pc:sldChg chg="modSp add mod ord modNotesTx">
         <pc:chgData name="Cooling, Chris" userId="6dcf99c9-2ba5-410a-8445-0893a3d1421f" providerId="ADAL" clId="{8C183C37-6B7E-40E2-8547-5D694AB320C7}" dt="2024-10-25T14:25:49.894" v="225" actId="33524"/>
@@ -569,22 +337,6 @@
           <pc:docMk/>
           <pc:sldMk cId="2308101793" sldId="421"/>
         </pc:sldMkLst>
-        <pc:spChg chg="mod">
-          <ac:chgData name="Cooling, Chris" userId="6dcf99c9-2ba5-410a-8445-0893a3d1421f" providerId="ADAL" clId="{8C183C37-6B7E-40E2-8547-5D694AB320C7}" dt="2024-10-25T14:25:08.276" v="217" actId="20577"/>
-          <ac:spMkLst>
-            <pc:docMk/>
-            <pc:sldMk cId="2308101793" sldId="421"/>
-            <ac:spMk id="2" creationId="{6F5D226D-AEEE-9CAD-EC6D-58B1E3EBB257}"/>
-          </ac:spMkLst>
-        </pc:spChg>
-        <pc:spChg chg="mod">
-          <ac:chgData name="Cooling, Chris" userId="6dcf99c9-2ba5-410a-8445-0893a3d1421f" providerId="ADAL" clId="{8C183C37-6B7E-40E2-8547-5D694AB320C7}" dt="2024-10-25T14:25:19.679" v="219" actId="12"/>
-          <ac:spMkLst>
-            <pc:docMk/>
-            <pc:sldMk cId="2308101793" sldId="421"/>
-            <ac:spMk id="3" creationId="{AE72B19A-BAEF-7DAE-DDC1-54394DA86691}"/>
-          </ac:spMkLst>
-        </pc:spChg>
       </pc:sldChg>
       <pc:sldChg chg="modSp add mod modNotesTx">
         <pc:chgData name="Cooling, Chris" userId="6dcf99c9-2ba5-410a-8445-0893a3d1421f" providerId="ADAL" clId="{8C183C37-6B7E-40E2-8547-5D694AB320C7}" dt="2024-10-25T14:26:37.056" v="231"/>
@@ -592,22 +344,6 @@
           <pc:docMk/>
           <pc:sldMk cId="3901332093" sldId="422"/>
         </pc:sldMkLst>
-        <pc:spChg chg="mod">
-          <ac:chgData name="Cooling, Chris" userId="6dcf99c9-2ba5-410a-8445-0893a3d1421f" providerId="ADAL" clId="{8C183C37-6B7E-40E2-8547-5D694AB320C7}" dt="2024-10-25T14:26:14.862" v="227"/>
-          <ac:spMkLst>
-            <pc:docMk/>
-            <pc:sldMk cId="3901332093" sldId="422"/>
-            <ac:spMk id="2" creationId="{6F5D226D-AEEE-9CAD-EC6D-58B1E3EBB257}"/>
-          </ac:spMkLst>
-        </pc:spChg>
-        <pc:spChg chg="mod">
-          <ac:chgData name="Cooling, Chris" userId="6dcf99c9-2ba5-410a-8445-0893a3d1421f" providerId="ADAL" clId="{8C183C37-6B7E-40E2-8547-5D694AB320C7}" dt="2024-10-25T14:26:30.397" v="230" actId="12"/>
-          <ac:spMkLst>
-            <pc:docMk/>
-            <pc:sldMk cId="3901332093" sldId="422"/>
-            <ac:spMk id="3" creationId="{AE72B19A-BAEF-7DAE-DDC1-54394DA86691}"/>
-          </ac:spMkLst>
-        </pc:spChg>
       </pc:sldChg>
       <pc:sldChg chg="addSp modSp add mod modNotesTx">
         <pc:chgData name="Cooling, Chris" userId="6dcf99c9-2ba5-410a-8445-0893a3d1421f" providerId="ADAL" clId="{8C183C37-6B7E-40E2-8547-5D694AB320C7}" dt="2024-10-25T14:28:50.946" v="240" actId="1076"/>
@@ -615,30 +351,6 @@
           <pc:docMk/>
           <pc:sldMk cId="1558813636" sldId="423"/>
         </pc:sldMkLst>
-        <pc:spChg chg="mod">
-          <ac:chgData name="Cooling, Chris" userId="6dcf99c9-2ba5-410a-8445-0893a3d1421f" providerId="ADAL" clId="{8C183C37-6B7E-40E2-8547-5D694AB320C7}" dt="2024-10-25T14:26:57.069" v="233"/>
-          <ac:spMkLst>
-            <pc:docMk/>
-            <pc:sldMk cId="1558813636" sldId="423"/>
-            <ac:spMk id="2" creationId="{6F5D226D-AEEE-9CAD-EC6D-58B1E3EBB257}"/>
-          </ac:spMkLst>
-        </pc:spChg>
-        <pc:spChg chg="mod">
-          <ac:chgData name="Cooling, Chris" userId="6dcf99c9-2ba5-410a-8445-0893a3d1421f" providerId="ADAL" clId="{8C183C37-6B7E-40E2-8547-5D694AB320C7}" dt="2024-10-25T14:27:18.866" v="237" actId="15"/>
-          <ac:spMkLst>
-            <pc:docMk/>
-            <pc:sldMk cId="1558813636" sldId="423"/>
-            <ac:spMk id="3" creationId="{AE72B19A-BAEF-7DAE-DDC1-54394DA86691}"/>
-          </ac:spMkLst>
-        </pc:spChg>
-        <pc:spChg chg="add mod">
-          <ac:chgData name="Cooling, Chris" userId="6dcf99c9-2ba5-410a-8445-0893a3d1421f" providerId="ADAL" clId="{8C183C37-6B7E-40E2-8547-5D694AB320C7}" dt="2024-10-25T14:28:50.946" v="240" actId="1076"/>
-          <ac:spMkLst>
-            <pc:docMk/>
-            <pc:sldMk cId="1558813636" sldId="423"/>
-            <ac:spMk id="4" creationId="{90207AAD-6F2F-D065-AD81-F892DF44606A}"/>
-          </ac:spMkLst>
-        </pc:spChg>
       </pc:sldChg>
       <pc:sldChg chg="addSp delSp modSp add mod modNotesTx">
         <pc:chgData name="Cooling, Chris" userId="6dcf99c9-2ba5-410a-8445-0893a3d1421f" providerId="ADAL" clId="{8C183C37-6B7E-40E2-8547-5D694AB320C7}" dt="2024-10-29T14:09:08.606" v="369" actId="15"/>
@@ -646,38 +358,6 @@
           <pc:docMk/>
           <pc:sldMk cId="2059856429" sldId="424"/>
         </pc:sldMkLst>
-        <pc:spChg chg="mod">
-          <ac:chgData name="Cooling, Chris" userId="6dcf99c9-2ba5-410a-8445-0893a3d1421f" providerId="ADAL" clId="{8C183C37-6B7E-40E2-8547-5D694AB320C7}" dt="2024-10-25T14:29:32.725" v="242"/>
-          <ac:spMkLst>
-            <pc:docMk/>
-            <pc:sldMk cId="2059856429" sldId="424"/>
-            <ac:spMk id="2" creationId="{6F5D226D-AEEE-9CAD-EC6D-58B1E3EBB257}"/>
-          </ac:spMkLst>
-        </pc:spChg>
-        <pc:spChg chg="mod">
-          <ac:chgData name="Cooling, Chris" userId="6dcf99c9-2ba5-410a-8445-0893a3d1421f" providerId="ADAL" clId="{8C183C37-6B7E-40E2-8547-5D694AB320C7}" dt="2024-10-29T14:09:08.606" v="369" actId="15"/>
-          <ac:spMkLst>
-            <pc:docMk/>
-            <pc:sldMk cId="2059856429" sldId="424"/>
-            <ac:spMk id="3" creationId="{AE72B19A-BAEF-7DAE-DDC1-54394DA86691}"/>
-          </ac:spMkLst>
-        </pc:spChg>
-        <pc:spChg chg="del">
-          <ac:chgData name="Cooling, Chris" userId="6dcf99c9-2ba5-410a-8445-0893a3d1421f" providerId="ADAL" clId="{8C183C37-6B7E-40E2-8547-5D694AB320C7}" dt="2024-10-25T14:29:40.412" v="243" actId="478"/>
-          <ac:spMkLst>
-            <pc:docMk/>
-            <pc:sldMk cId="2059856429" sldId="424"/>
-            <ac:spMk id="4" creationId="{90207AAD-6F2F-D065-AD81-F892DF44606A}"/>
-          </ac:spMkLst>
-        </pc:spChg>
-        <pc:spChg chg="add mod">
-          <ac:chgData name="Cooling, Chris" userId="6dcf99c9-2ba5-410a-8445-0893a3d1421f" providerId="ADAL" clId="{8C183C37-6B7E-40E2-8547-5D694AB320C7}" dt="2024-10-25T14:29:47.944" v="245" actId="1076"/>
-          <ac:spMkLst>
-            <pc:docMk/>
-            <pc:sldMk cId="2059856429" sldId="424"/>
-            <ac:spMk id="8" creationId="{8E3E2AEC-1485-CCD8-B854-4AD0750B3E15}"/>
-          </ac:spMkLst>
-        </pc:spChg>
       </pc:sldChg>
       <pc:sldChg chg="modSp add mod modNotesTx">
         <pc:chgData name="Cooling, Chris" userId="6dcf99c9-2ba5-410a-8445-0893a3d1421f" providerId="ADAL" clId="{8C183C37-6B7E-40E2-8547-5D694AB320C7}" dt="2024-10-25T14:32:19.374" v="252"/>
@@ -685,22 +365,6 @@
           <pc:docMk/>
           <pc:sldMk cId="2356515138" sldId="425"/>
         </pc:sldMkLst>
-        <pc:spChg chg="mod">
-          <ac:chgData name="Cooling, Chris" userId="6dcf99c9-2ba5-410a-8445-0893a3d1421f" providerId="ADAL" clId="{8C183C37-6B7E-40E2-8547-5D694AB320C7}" dt="2024-10-25T14:31:58.248" v="248"/>
-          <ac:spMkLst>
-            <pc:docMk/>
-            <pc:sldMk cId="2356515138" sldId="425"/>
-            <ac:spMk id="2" creationId="{6F5D226D-AEEE-9CAD-EC6D-58B1E3EBB257}"/>
-          </ac:spMkLst>
-        </pc:spChg>
-        <pc:spChg chg="mod">
-          <ac:chgData name="Cooling, Chris" userId="6dcf99c9-2ba5-410a-8445-0893a3d1421f" providerId="ADAL" clId="{8C183C37-6B7E-40E2-8547-5D694AB320C7}" dt="2024-10-25T14:32:14.045" v="251" actId="15"/>
-          <ac:spMkLst>
-            <pc:docMk/>
-            <pc:sldMk cId="2356515138" sldId="425"/>
-            <ac:spMk id="3" creationId="{AE72B19A-BAEF-7DAE-DDC1-54394DA86691}"/>
-          </ac:spMkLst>
-        </pc:spChg>
       </pc:sldChg>
       <pc:sldChg chg="delSp modSp add mod modNotesTx">
         <pc:chgData name="Cooling, Chris" userId="6dcf99c9-2ba5-410a-8445-0893a3d1421f" providerId="ADAL" clId="{8C183C37-6B7E-40E2-8547-5D694AB320C7}" dt="2024-10-25T14:33:34.117" v="263" actId="478"/>
@@ -708,30 +372,6 @@
           <pc:docMk/>
           <pc:sldMk cId="1556729711" sldId="426"/>
         </pc:sldMkLst>
-        <pc:spChg chg="mod">
-          <ac:chgData name="Cooling, Chris" userId="6dcf99c9-2ba5-410a-8445-0893a3d1421f" providerId="ADAL" clId="{8C183C37-6B7E-40E2-8547-5D694AB320C7}" dt="2024-10-25T14:32:44.232" v="254"/>
-          <ac:spMkLst>
-            <pc:docMk/>
-            <pc:sldMk cId="1556729711" sldId="426"/>
-            <ac:spMk id="2" creationId="{6F5D226D-AEEE-9CAD-EC6D-58B1E3EBB257}"/>
-          </ac:spMkLst>
-        </pc:spChg>
-        <pc:spChg chg="mod">
-          <ac:chgData name="Cooling, Chris" userId="6dcf99c9-2ba5-410a-8445-0893a3d1421f" providerId="ADAL" clId="{8C183C37-6B7E-40E2-8547-5D694AB320C7}" dt="2024-10-25T14:33:00.208" v="259" actId="313"/>
-          <ac:spMkLst>
-            <pc:docMk/>
-            <pc:sldMk cId="1556729711" sldId="426"/>
-            <ac:spMk id="3" creationId="{AE72B19A-BAEF-7DAE-DDC1-54394DA86691}"/>
-          </ac:spMkLst>
-        </pc:spChg>
-        <pc:spChg chg="del">
-          <ac:chgData name="Cooling, Chris" userId="6dcf99c9-2ba5-410a-8445-0893a3d1421f" providerId="ADAL" clId="{8C183C37-6B7E-40E2-8547-5D694AB320C7}" dt="2024-10-25T14:33:34.117" v="263" actId="478"/>
-          <ac:spMkLst>
-            <pc:docMk/>
-            <pc:sldMk cId="1556729711" sldId="426"/>
-            <ac:spMk id="8" creationId="{8E3E2AEC-1485-CCD8-B854-4AD0750B3E15}"/>
-          </ac:spMkLst>
-        </pc:spChg>
       </pc:sldChg>
       <pc:sldChg chg="delSp modSp add mod">
         <pc:chgData name="Cooling, Chris" userId="6dcf99c9-2ba5-410a-8445-0893a3d1421f" providerId="ADAL" clId="{8C183C37-6B7E-40E2-8547-5D694AB320C7}" dt="2024-10-25T14:33:51.603" v="266" actId="12"/>
@@ -739,30 +379,6 @@
           <pc:docMk/>
           <pc:sldMk cId="2622411131" sldId="427"/>
         </pc:sldMkLst>
-        <pc:spChg chg="mod">
-          <ac:chgData name="Cooling, Chris" userId="6dcf99c9-2ba5-410a-8445-0893a3d1421f" providerId="ADAL" clId="{8C183C37-6B7E-40E2-8547-5D694AB320C7}" dt="2024-10-25T14:33:26.208" v="262"/>
-          <ac:spMkLst>
-            <pc:docMk/>
-            <pc:sldMk cId="2622411131" sldId="427"/>
-            <ac:spMk id="2" creationId="{6F5D226D-AEEE-9CAD-EC6D-58B1E3EBB257}"/>
-          </ac:spMkLst>
-        </pc:spChg>
-        <pc:spChg chg="mod">
-          <ac:chgData name="Cooling, Chris" userId="6dcf99c9-2ba5-410a-8445-0893a3d1421f" providerId="ADAL" clId="{8C183C37-6B7E-40E2-8547-5D694AB320C7}" dt="2024-10-25T14:33:51.603" v="266" actId="12"/>
-          <ac:spMkLst>
-            <pc:docMk/>
-            <pc:sldMk cId="2622411131" sldId="427"/>
-            <ac:spMk id="3" creationId="{AE72B19A-BAEF-7DAE-DDC1-54394DA86691}"/>
-          </ac:spMkLst>
-        </pc:spChg>
-        <pc:spChg chg="del">
-          <ac:chgData name="Cooling, Chris" userId="6dcf99c9-2ba5-410a-8445-0893a3d1421f" providerId="ADAL" clId="{8C183C37-6B7E-40E2-8547-5D694AB320C7}" dt="2024-10-25T14:33:39.685" v="264" actId="478"/>
-          <ac:spMkLst>
-            <pc:docMk/>
-            <pc:sldMk cId="2622411131" sldId="427"/>
-            <ac:spMk id="8" creationId="{8E3E2AEC-1485-CCD8-B854-4AD0750B3E15}"/>
-          </ac:spMkLst>
-        </pc:spChg>
       </pc:sldChg>
       <pc:sldChg chg="modSp add mod modNotesTx">
         <pc:chgData name="Cooling, Chris" userId="6dcf99c9-2ba5-410a-8445-0893a3d1421f" providerId="ADAL" clId="{8C183C37-6B7E-40E2-8547-5D694AB320C7}" dt="2024-10-25T14:34:47.164" v="280"/>
@@ -770,22 +386,6 @@
           <pc:docMk/>
           <pc:sldMk cId="1669763124" sldId="428"/>
         </pc:sldMkLst>
-        <pc:spChg chg="mod">
-          <ac:chgData name="Cooling, Chris" userId="6dcf99c9-2ba5-410a-8445-0893a3d1421f" providerId="ADAL" clId="{8C183C37-6B7E-40E2-8547-5D694AB320C7}" dt="2024-10-25T14:34:10.723" v="268"/>
-          <ac:spMkLst>
-            <pc:docMk/>
-            <pc:sldMk cId="1669763124" sldId="428"/>
-            <ac:spMk id="2" creationId="{6F5D226D-AEEE-9CAD-EC6D-58B1E3EBB257}"/>
-          </ac:spMkLst>
-        </pc:spChg>
-        <pc:spChg chg="mod">
-          <ac:chgData name="Cooling, Chris" userId="6dcf99c9-2ba5-410a-8445-0893a3d1421f" providerId="ADAL" clId="{8C183C37-6B7E-40E2-8547-5D694AB320C7}" dt="2024-10-25T14:34:38.042" v="279" actId="20577"/>
-          <ac:spMkLst>
-            <pc:docMk/>
-            <pc:sldMk cId="1669763124" sldId="428"/>
-            <ac:spMk id="3" creationId="{AE72B19A-BAEF-7DAE-DDC1-54394DA86691}"/>
-          </ac:spMkLst>
-        </pc:spChg>
       </pc:sldChg>
       <pc:sldChg chg="addSp modSp add mod modNotesTx">
         <pc:chgData name="Cooling, Chris" userId="6dcf99c9-2ba5-410a-8445-0893a3d1421f" providerId="ADAL" clId="{8C183C37-6B7E-40E2-8547-5D694AB320C7}" dt="2024-10-25T14:35:46.385" v="287"/>
@@ -793,30 +393,6 @@
           <pc:docMk/>
           <pc:sldMk cId="440286946" sldId="429"/>
         </pc:sldMkLst>
-        <pc:spChg chg="mod">
-          <ac:chgData name="Cooling, Chris" userId="6dcf99c9-2ba5-410a-8445-0893a3d1421f" providerId="ADAL" clId="{8C183C37-6B7E-40E2-8547-5D694AB320C7}" dt="2024-10-25T14:35:02.424" v="282"/>
-          <ac:spMkLst>
-            <pc:docMk/>
-            <pc:sldMk cId="440286946" sldId="429"/>
-            <ac:spMk id="2" creationId="{6F5D226D-AEEE-9CAD-EC6D-58B1E3EBB257}"/>
-          </ac:spMkLst>
-        </pc:spChg>
-        <pc:spChg chg="mod">
-          <ac:chgData name="Cooling, Chris" userId="6dcf99c9-2ba5-410a-8445-0893a3d1421f" providerId="ADAL" clId="{8C183C37-6B7E-40E2-8547-5D694AB320C7}" dt="2024-10-25T14:35:12.855" v="284" actId="12"/>
-          <ac:spMkLst>
-            <pc:docMk/>
-            <pc:sldMk cId="440286946" sldId="429"/>
-            <ac:spMk id="3" creationId="{AE72B19A-BAEF-7DAE-DDC1-54394DA86691}"/>
-          </ac:spMkLst>
-        </pc:spChg>
-        <pc:spChg chg="add mod">
-          <ac:chgData name="Cooling, Chris" userId="6dcf99c9-2ba5-410a-8445-0893a3d1421f" providerId="ADAL" clId="{8C183C37-6B7E-40E2-8547-5D694AB320C7}" dt="2024-10-25T14:35:25.774" v="286" actId="1076"/>
-          <ac:spMkLst>
-            <pc:docMk/>
-            <pc:sldMk cId="440286946" sldId="429"/>
-            <ac:spMk id="4" creationId="{452FD99C-103A-FBF9-875D-4617BC993236}"/>
-          </ac:spMkLst>
-        </pc:spChg>
       </pc:sldChg>
       <pc:sldChg chg="addSp delSp modSp add mod modNotesTx">
         <pc:chgData name="Cooling, Chris" userId="6dcf99c9-2ba5-410a-8445-0893a3d1421f" providerId="ADAL" clId="{8C183C37-6B7E-40E2-8547-5D694AB320C7}" dt="2024-10-25T14:36:46.639" v="297"/>
@@ -824,38 +400,6 @@
           <pc:docMk/>
           <pc:sldMk cId="3427201238" sldId="430"/>
         </pc:sldMkLst>
-        <pc:spChg chg="mod">
-          <ac:chgData name="Cooling, Chris" userId="6dcf99c9-2ba5-410a-8445-0893a3d1421f" providerId="ADAL" clId="{8C183C37-6B7E-40E2-8547-5D694AB320C7}" dt="2024-10-25T14:36:05.148" v="289"/>
-          <ac:spMkLst>
-            <pc:docMk/>
-            <pc:sldMk cId="3427201238" sldId="430"/>
-            <ac:spMk id="2" creationId="{6F5D226D-AEEE-9CAD-EC6D-58B1E3EBB257}"/>
-          </ac:spMkLst>
-        </pc:spChg>
-        <pc:spChg chg="mod">
-          <ac:chgData name="Cooling, Chris" userId="6dcf99c9-2ba5-410a-8445-0893a3d1421f" providerId="ADAL" clId="{8C183C37-6B7E-40E2-8547-5D694AB320C7}" dt="2024-10-25T14:36:24.939" v="293" actId="15"/>
-          <ac:spMkLst>
-            <pc:docMk/>
-            <pc:sldMk cId="3427201238" sldId="430"/>
-            <ac:spMk id="3" creationId="{AE72B19A-BAEF-7DAE-DDC1-54394DA86691}"/>
-          </ac:spMkLst>
-        </pc:spChg>
-        <pc:spChg chg="del">
-          <ac:chgData name="Cooling, Chris" userId="6dcf99c9-2ba5-410a-8445-0893a3d1421f" providerId="ADAL" clId="{8C183C37-6B7E-40E2-8547-5D694AB320C7}" dt="2024-10-25T14:36:34.741" v="294" actId="478"/>
-          <ac:spMkLst>
-            <pc:docMk/>
-            <pc:sldMk cId="3427201238" sldId="430"/>
-            <ac:spMk id="4" creationId="{452FD99C-103A-FBF9-875D-4617BC993236}"/>
-          </ac:spMkLst>
-        </pc:spChg>
-        <pc:spChg chg="add mod">
-          <ac:chgData name="Cooling, Chris" userId="6dcf99c9-2ba5-410a-8445-0893a3d1421f" providerId="ADAL" clId="{8C183C37-6B7E-40E2-8547-5D694AB320C7}" dt="2024-10-25T14:36:40.883" v="296" actId="1076"/>
-          <ac:spMkLst>
-            <pc:docMk/>
-            <pc:sldMk cId="3427201238" sldId="430"/>
-            <ac:spMk id="8" creationId="{887364C7-CBF7-AFB1-5EBA-04F733F62AFF}"/>
-          </ac:spMkLst>
-        </pc:spChg>
       </pc:sldChg>
       <pc:sldChg chg="modSp add mod modNotesTx">
         <pc:chgData name="Cooling, Chris" userId="6dcf99c9-2ba5-410a-8445-0893a3d1421f" providerId="ADAL" clId="{8C183C37-6B7E-40E2-8547-5D694AB320C7}" dt="2024-10-25T14:38:27.598" v="309" actId="15"/>
@@ -863,22 +407,6 @@
           <pc:docMk/>
           <pc:sldMk cId="3924133401" sldId="431"/>
         </pc:sldMkLst>
-        <pc:spChg chg="mod">
-          <ac:chgData name="Cooling, Chris" userId="6dcf99c9-2ba5-410a-8445-0893a3d1421f" providerId="ADAL" clId="{8C183C37-6B7E-40E2-8547-5D694AB320C7}" dt="2024-10-25T14:37:05.858" v="299"/>
-          <ac:spMkLst>
-            <pc:docMk/>
-            <pc:sldMk cId="3924133401" sldId="431"/>
-            <ac:spMk id="2" creationId="{6F5D226D-AEEE-9CAD-EC6D-58B1E3EBB257}"/>
-          </ac:spMkLst>
-        </pc:spChg>
-        <pc:spChg chg="mod">
-          <ac:chgData name="Cooling, Chris" userId="6dcf99c9-2ba5-410a-8445-0893a3d1421f" providerId="ADAL" clId="{8C183C37-6B7E-40E2-8547-5D694AB320C7}" dt="2024-10-25T14:38:27.598" v="309" actId="15"/>
-          <ac:spMkLst>
-            <pc:docMk/>
-            <pc:sldMk cId="3924133401" sldId="431"/>
-            <ac:spMk id="3" creationId="{AE72B19A-BAEF-7DAE-DDC1-54394DA86691}"/>
-          </ac:spMkLst>
-        </pc:spChg>
       </pc:sldChg>
       <pc:sldChg chg="delSp modSp add del mod">
         <pc:chgData name="Cooling, Chris" userId="6dcf99c9-2ba5-410a-8445-0893a3d1421f" providerId="ADAL" clId="{8C183C37-6B7E-40E2-8547-5D694AB320C7}" dt="2024-10-25T14:39:01.682" v="310" actId="47"/>
@@ -886,22 +414,6 @@
           <pc:docMk/>
           <pc:sldMk cId="1895183644" sldId="432"/>
         </pc:sldMkLst>
-        <pc:spChg chg="mod">
-          <ac:chgData name="Cooling, Chris" userId="6dcf99c9-2ba5-410a-8445-0893a3d1421f" providerId="ADAL" clId="{8C183C37-6B7E-40E2-8547-5D694AB320C7}" dt="2024-10-25T14:37:46.167" v="305"/>
-          <ac:spMkLst>
-            <pc:docMk/>
-            <pc:sldMk cId="1895183644" sldId="432"/>
-            <ac:spMk id="2" creationId="{6F5D226D-AEEE-9CAD-EC6D-58B1E3EBB257}"/>
-          </ac:spMkLst>
-        </pc:spChg>
-        <pc:spChg chg="del">
-          <ac:chgData name="Cooling, Chris" userId="6dcf99c9-2ba5-410a-8445-0893a3d1421f" providerId="ADAL" clId="{8C183C37-6B7E-40E2-8547-5D694AB320C7}" dt="2024-10-25T14:37:51.568" v="306" actId="478"/>
-          <ac:spMkLst>
-            <pc:docMk/>
-            <pc:sldMk cId="1895183644" sldId="432"/>
-            <ac:spMk id="8" creationId="{887364C7-CBF7-AFB1-5EBA-04F733F62AFF}"/>
-          </ac:spMkLst>
-        </pc:spChg>
       </pc:sldChg>
       <pc:sldChg chg="delSp modSp add mod modNotesTx">
         <pc:chgData name="Cooling, Chris" userId="6dcf99c9-2ba5-410a-8445-0893a3d1421f" providerId="ADAL" clId="{8C183C37-6B7E-40E2-8547-5D694AB320C7}" dt="2024-10-25T14:39:35.013" v="315"/>
@@ -909,30 +421,6 @@
           <pc:docMk/>
           <pc:sldMk cId="3530954581" sldId="432"/>
         </pc:sldMkLst>
-        <pc:spChg chg="mod">
-          <ac:chgData name="Cooling, Chris" userId="6dcf99c9-2ba5-410a-8445-0893a3d1421f" providerId="ADAL" clId="{8C183C37-6B7E-40E2-8547-5D694AB320C7}" dt="2024-10-25T14:39:22.358" v="312"/>
-          <ac:spMkLst>
-            <pc:docMk/>
-            <pc:sldMk cId="3530954581" sldId="432"/>
-            <ac:spMk id="2" creationId="{6F5D226D-AEEE-9CAD-EC6D-58B1E3EBB257}"/>
-          </ac:spMkLst>
-        </pc:spChg>
-        <pc:spChg chg="mod">
-          <ac:chgData name="Cooling, Chris" userId="6dcf99c9-2ba5-410a-8445-0893a3d1421f" providerId="ADAL" clId="{8C183C37-6B7E-40E2-8547-5D694AB320C7}" dt="2024-10-25T14:39:30.748" v="314"/>
-          <ac:spMkLst>
-            <pc:docMk/>
-            <pc:sldMk cId="3530954581" sldId="432"/>
-            <ac:spMk id="3" creationId="{AE72B19A-BAEF-7DAE-DDC1-54394DA86691}"/>
-          </ac:spMkLst>
-        </pc:spChg>
-        <pc:spChg chg="del">
-          <ac:chgData name="Cooling, Chris" userId="6dcf99c9-2ba5-410a-8445-0893a3d1421f" providerId="ADAL" clId="{8C183C37-6B7E-40E2-8547-5D694AB320C7}" dt="2024-10-25T14:39:25.601" v="313" actId="478"/>
-          <ac:spMkLst>
-            <pc:docMk/>
-            <pc:sldMk cId="3530954581" sldId="432"/>
-            <ac:spMk id="8" creationId="{887364C7-CBF7-AFB1-5EBA-04F733F62AFF}"/>
-          </ac:spMkLst>
-        </pc:spChg>
       </pc:sldChg>
       <pc:sldChg chg="addSp modSp add mod modNotesTx">
         <pc:chgData name="Cooling, Chris" userId="6dcf99c9-2ba5-410a-8445-0893a3d1421f" providerId="ADAL" clId="{8C183C37-6B7E-40E2-8547-5D694AB320C7}" dt="2024-10-25T14:40:54.648" v="323" actId="1076"/>
@@ -940,22 +428,6 @@
           <pc:docMk/>
           <pc:sldMk cId="4232310399" sldId="433"/>
         </pc:sldMkLst>
-        <pc:spChg chg="mod">
-          <ac:chgData name="Cooling, Chris" userId="6dcf99c9-2ba5-410a-8445-0893a3d1421f" providerId="ADAL" clId="{8C183C37-6B7E-40E2-8547-5D694AB320C7}" dt="2024-10-25T14:39:57.697" v="318" actId="12"/>
-          <ac:spMkLst>
-            <pc:docMk/>
-            <pc:sldMk cId="4232310399" sldId="433"/>
-            <ac:spMk id="3" creationId="{AE72B19A-BAEF-7DAE-DDC1-54394DA86691}"/>
-          </ac:spMkLst>
-        </pc:spChg>
-        <pc:spChg chg="add mod">
-          <ac:chgData name="Cooling, Chris" userId="6dcf99c9-2ba5-410a-8445-0893a3d1421f" providerId="ADAL" clId="{8C183C37-6B7E-40E2-8547-5D694AB320C7}" dt="2024-10-25T14:40:54.648" v="323" actId="1076"/>
-          <ac:spMkLst>
-            <pc:docMk/>
-            <pc:sldMk cId="4232310399" sldId="433"/>
-            <ac:spMk id="4" creationId="{D7C4DA86-9C4E-2221-F012-9B6B888D7EDA}"/>
-          </ac:spMkLst>
-        </pc:spChg>
       </pc:sldChg>
       <pc:sldChg chg="delSp modSp add mod modNotesTx">
         <pc:chgData name="Cooling, Chris" userId="6dcf99c9-2ba5-410a-8445-0893a3d1421f" providerId="ADAL" clId="{8C183C37-6B7E-40E2-8547-5D694AB320C7}" dt="2024-10-25T14:42:18.718" v="341"/>
@@ -963,30 +435,6 @@
           <pc:docMk/>
           <pc:sldMk cId="3844608033" sldId="434"/>
         </pc:sldMkLst>
-        <pc:spChg chg="mod">
-          <ac:chgData name="Cooling, Chris" userId="6dcf99c9-2ba5-410a-8445-0893a3d1421f" providerId="ADAL" clId="{8C183C37-6B7E-40E2-8547-5D694AB320C7}" dt="2024-10-25T14:41:12.433" v="335" actId="20577"/>
-          <ac:spMkLst>
-            <pc:docMk/>
-            <pc:sldMk cId="3844608033" sldId="434"/>
-            <ac:spMk id="2" creationId="{6F5D226D-AEEE-9CAD-EC6D-58B1E3EBB257}"/>
-          </ac:spMkLst>
-        </pc:spChg>
-        <pc:spChg chg="mod">
-          <ac:chgData name="Cooling, Chris" userId="6dcf99c9-2ba5-410a-8445-0893a3d1421f" providerId="ADAL" clId="{8C183C37-6B7E-40E2-8547-5D694AB320C7}" dt="2024-10-25T14:41:23.733" v="338" actId="15"/>
-          <ac:spMkLst>
-            <pc:docMk/>
-            <pc:sldMk cId="3844608033" sldId="434"/>
-            <ac:spMk id="3" creationId="{AE72B19A-BAEF-7DAE-DDC1-54394DA86691}"/>
-          </ac:spMkLst>
-        </pc:spChg>
-        <pc:spChg chg="del">
-          <ac:chgData name="Cooling, Chris" userId="6dcf99c9-2ba5-410a-8445-0893a3d1421f" providerId="ADAL" clId="{8C183C37-6B7E-40E2-8547-5D694AB320C7}" dt="2024-10-25T14:41:43.942" v="340" actId="478"/>
-          <ac:spMkLst>
-            <pc:docMk/>
-            <pc:sldMk cId="3844608033" sldId="434"/>
-            <ac:spMk id="4" creationId="{D7C4DA86-9C4E-2221-F012-9B6B888D7EDA}"/>
-          </ac:spMkLst>
-        </pc:spChg>
       </pc:sldChg>
       <pc:sldChg chg="delSp modSp add mod">
         <pc:chgData name="Cooling, Chris" userId="6dcf99c9-2ba5-410a-8445-0893a3d1421f" providerId="ADAL" clId="{8C183C37-6B7E-40E2-8547-5D694AB320C7}" dt="2024-10-25T14:43:27.502" v="354" actId="15"/>
@@ -994,30 +442,6 @@
           <pc:docMk/>
           <pc:sldMk cId="2504663500" sldId="435"/>
         </pc:sldMkLst>
-        <pc:spChg chg="mod">
-          <ac:chgData name="Cooling, Chris" userId="6dcf99c9-2ba5-410a-8445-0893a3d1421f" providerId="ADAL" clId="{8C183C37-6B7E-40E2-8547-5D694AB320C7}" dt="2024-10-25T14:42:28.348" v="349" actId="20577"/>
-          <ac:spMkLst>
-            <pc:docMk/>
-            <pc:sldMk cId="2504663500" sldId="435"/>
-            <ac:spMk id="2" creationId="{6F5D226D-AEEE-9CAD-EC6D-58B1E3EBB257}"/>
-          </ac:spMkLst>
-        </pc:spChg>
-        <pc:spChg chg="mod">
-          <ac:chgData name="Cooling, Chris" userId="6dcf99c9-2ba5-410a-8445-0893a3d1421f" providerId="ADAL" clId="{8C183C37-6B7E-40E2-8547-5D694AB320C7}" dt="2024-10-25T14:43:27.502" v="354" actId="15"/>
-          <ac:spMkLst>
-            <pc:docMk/>
-            <pc:sldMk cId="2504663500" sldId="435"/>
-            <ac:spMk id="3" creationId="{AE72B19A-BAEF-7DAE-DDC1-54394DA86691}"/>
-          </ac:spMkLst>
-        </pc:spChg>
-        <pc:spChg chg="del">
-          <ac:chgData name="Cooling, Chris" userId="6dcf99c9-2ba5-410a-8445-0893a3d1421f" providerId="ADAL" clId="{8C183C37-6B7E-40E2-8547-5D694AB320C7}" dt="2024-10-25T14:43:09.816" v="351" actId="478"/>
-          <ac:spMkLst>
-            <pc:docMk/>
-            <pc:sldMk cId="2504663500" sldId="435"/>
-            <ac:spMk id="4" creationId="{D7C4DA86-9C4E-2221-F012-9B6B888D7EDA}"/>
-          </ac:spMkLst>
-        </pc:spChg>
       </pc:sldChg>
       <pc:sldChg chg="modSp add mod">
         <pc:chgData name="Cooling, Chris" userId="6dcf99c9-2ba5-410a-8445-0893a3d1421f" providerId="ADAL" clId="{8C183C37-6B7E-40E2-8547-5D694AB320C7}" dt="2024-11-01T15:00:52.201" v="420" actId="20577"/>
@@ -1025,22 +449,6 @@
           <pc:docMk/>
           <pc:sldMk cId="3556050136" sldId="436"/>
         </pc:sldMkLst>
-        <pc:spChg chg="mod">
-          <ac:chgData name="Cooling, Chris" userId="6dcf99c9-2ba5-410a-8445-0893a3d1421f" providerId="ADAL" clId="{8C183C37-6B7E-40E2-8547-5D694AB320C7}" dt="2024-10-25T14:44:06.487" v="356"/>
-          <ac:spMkLst>
-            <pc:docMk/>
-            <pc:sldMk cId="3556050136" sldId="436"/>
-            <ac:spMk id="2" creationId="{6F5D226D-AEEE-9CAD-EC6D-58B1E3EBB257}"/>
-          </ac:spMkLst>
-        </pc:spChg>
-        <pc:spChg chg="mod">
-          <ac:chgData name="Cooling, Chris" userId="6dcf99c9-2ba5-410a-8445-0893a3d1421f" providerId="ADAL" clId="{8C183C37-6B7E-40E2-8547-5D694AB320C7}" dt="2024-11-01T15:00:52.201" v="420" actId="20577"/>
-          <ac:spMkLst>
-            <pc:docMk/>
-            <pc:sldMk cId="3556050136" sldId="436"/>
-            <ac:spMk id="3" creationId="{AE72B19A-BAEF-7DAE-DDC1-54394DA86691}"/>
-          </ac:spMkLst>
-        </pc:spChg>
       </pc:sldChg>
       <pc:sldChg chg="modSp add mod">
         <pc:chgData name="Cooling, Chris" userId="6dcf99c9-2ba5-410a-8445-0893a3d1421f" providerId="ADAL" clId="{8C183C37-6B7E-40E2-8547-5D694AB320C7}" dt="2024-11-01T15:01:00.614" v="425" actId="20577"/>
@@ -1048,22 +456,6 @@
           <pc:docMk/>
           <pc:sldMk cId="47953750" sldId="437"/>
         </pc:sldMkLst>
-        <pc:spChg chg="mod">
-          <ac:chgData name="Cooling, Chris" userId="6dcf99c9-2ba5-410a-8445-0893a3d1421f" providerId="ADAL" clId="{8C183C37-6B7E-40E2-8547-5D694AB320C7}" dt="2024-10-25T14:44:38.706" v="360"/>
-          <ac:spMkLst>
-            <pc:docMk/>
-            <pc:sldMk cId="47953750" sldId="437"/>
-            <ac:spMk id="2" creationId="{6F5D226D-AEEE-9CAD-EC6D-58B1E3EBB257}"/>
-          </ac:spMkLst>
-        </pc:spChg>
-        <pc:spChg chg="mod">
-          <ac:chgData name="Cooling, Chris" userId="6dcf99c9-2ba5-410a-8445-0893a3d1421f" providerId="ADAL" clId="{8C183C37-6B7E-40E2-8547-5D694AB320C7}" dt="2024-11-01T15:01:00.614" v="425" actId="20577"/>
-          <ac:spMkLst>
-            <pc:docMk/>
-            <pc:sldMk cId="47953750" sldId="437"/>
-            <ac:spMk id="3" creationId="{AE72B19A-BAEF-7DAE-DDC1-54394DA86691}"/>
-          </ac:spMkLst>
-        </pc:spChg>
       </pc:sldChg>
     </pc:docChg>
   </pc:docChgLst>
@@ -1152,7 +544,7 @@
           <a:p>
             <a:fld id="{D2E0D2A8-8F95-47C2-ABE1-A779F5A43C98}" type="datetimeFigureOut">
               <a:rPr lang="en-US" smtClean="0"/>
-              <a:t>10/16/2025</a:t>
+              <a:t>10/24/2025</a:t>
             </a:fld>
             <a:endParaRPr lang="en-US"/>
           </a:p>
@@ -5947,7 +5339,7 @@
           <a:p>
             <a:fld id="{3C856526-9870-44E3-9BF4-D7E9F048CE19}" type="datetime1">
               <a:rPr lang="en-GB" smtClean="0"/>
-              <a:t>16/10/2025</a:t>
+              <a:t>24/10/2025</a:t>
             </a:fld>
             <a:endParaRPr lang="en-GB"/>
           </a:p>
@@ -6273,7 +5665,7 @@
           <a:p>
             <a:fld id="{E2715DC3-E7CE-491C-B0F8-9FB0C1A9D971}" type="datetime1">
               <a:rPr lang="en-GB" smtClean="0"/>
-              <a:t>16/10/2025</a:t>
+              <a:t>24/10/2025</a:t>
             </a:fld>
             <a:endParaRPr lang="en-GB"/>
           </a:p>
@@ -6601,7 +5993,7 @@
           <a:p>
             <a:fld id="{3E12C797-3D51-4532-86C6-808DD4FA685E}" type="datetime1">
               <a:rPr lang="en-GB" smtClean="0"/>
-              <a:t>16/10/2025</a:t>
+              <a:t>24/10/2025</a:t>
             </a:fld>
             <a:endParaRPr lang="en-GB"/>
           </a:p>
@@ -6977,7 +6369,7 @@
           <a:p>
             <a:fld id="{27C69686-0FBF-4501-81F5-40C710430EB0}" type="datetime1">
               <a:rPr lang="en-GB" smtClean="0"/>
-              <a:t>16/10/2025</a:t>
+              <a:t>24/10/2025</a:t>
             </a:fld>
             <a:endParaRPr lang="en-GB"/>
           </a:p>
@@ -7361,7 +6753,7 @@
           <a:p>
             <a:fld id="{07F43393-4ECE-48F4-84E5-60E541CE8671}" type="datetime1">
               <a:rPr lang="en-GB" smtClean="0"/>
-              <a:t>16/10/2025</a:t>
+              <a:t>24/10/2025</a:t>
             </a:fld>
             <a:endParaRPr lang="en-GB"/>
           </a:p>
@@ -7747,7 +7139,7 @@
           <a:p>
             <a:fld id="{67519201-7190-4B7A-8C0C-58AEE0DC7430}" type="datetime1">
               <a:rPr lang="en-GB" smtClean="0"/>
-              <a:t>16/10/2025</a:t>
+              <a:t>24/10/2025</a:t>
             </a:fld>
             <a:endParaRPr lang="en-GB"/>
           </a:p>
@@ -7975,7 +7367,7 @@
           <a:p>
             <a:fld id="{10623FC2-6830-4AE1-A246-5A56A4647077}" type="datetime1">
               <a:rPr lang="en-GB" smtClean="0"/>
-              <a:t>16/10/2025</a:t>
+              <a:t>24/10/2025</a:t>
             </a:fld>
             <a:endParaRPr lang="en-GB"/>
           </a:p>
@@ -8473,7 +7865,7 @@
           <a:p>
             <a:fld id="{E8511495-6DAD-496D-8110-FBBD835BD3A9}" type="datetime1">
               <a:rPr lang="en-GB" smtClean="0"/>
-              <a:t>16/10/2025</a:t>
+              <a:t>24/10/2025</a:t>
             </a:fld>
             <a:endParaRPr lang="en-GB"/>
           </a:p>
@@ -8973,7 +8365,7 @@
           <a:p>
             <a:fld id="{7C843B13-6A48-423F-B4AB-E1AF9D3CF21B}" type="datetime1">
               <a:rPr lang="en-GB" smtClean="0"/>
-              <a:t>16/10/2025</a:t>
+              <a:t>24/10/2025</a:t>
             </a:fld>
             <a:endParaRPr lang="en-GB"/>
           </a:p>
@@ -9463,7 +8855,7 @@
           <a:p>
             <a:fld id="{56A83211-21A1-4A01-BFDD-83E69FB2A09E}" type="datetime1">
               <a:rPr lang="en-GB" smtClean="0"/>
-              <a:t>16/10/2025</a:t>
+              <a:t>24/10/2025</a:t>
             </a:fld>
             <a:endParaRPr lang="en-GB"/>
           </a:p>
@@ -10274,7 +9666,7 @@
           <a:p>
             <a:fld id="{4DB54F66-C1A0-4CAE-8B60-BA02AB871479}" type="datetime1">
               <a:rPr lang="en-GB" smtClean="0"/>
-              <a:t>16/10/2025</a:t>
+              <a:t>24/10/2025</a:t>
             </a:fld>
             <a:endParaRPr lang="en-GB"/>
           </a:p>
@@ -10891,7 +10283,7 @@
           <a:p>
             <a:fld id="{62D94E9C-946A-434F-8C97-5DAB74C4AB63}" type="datetime1">
               <a:rPr lang="en-GB" smtClean="0"/>
-              <a:t>16/10/2025</a:t>
+              <a:t>24/10/2025</a:t>
             </a:fld>
             <a:endParaRPr lang="en-GB"/>
           </a:p>
@@ -11511,7 +10903,7 @@
           <a:p>
             <a:fld id="{72C46D22-C71B-464B-B075-EE6B5090E8AB}" type="datetime1">
               <a:rPr lang="en-GB" smtClean="0"/>
-              <a:t>16/10/2025</a:t>
+              <a:t>24/10/2025</a:t>
             </a:fld>
             <a:endParaRPr lang="en-GB"/>
           </a:p>
@@ -11682,7 +11074,7 @@
           <a:p>
             <a:fld id="{209E91A2-C31B-4762-B78F-5DF8A7B35BC5}" type="datetime1">
               <a:rPr lang="en-GB" smtClean="0"/>
-              <a:t>16/10/2025</a:t>
+              <a:t>24/10/2025</a:t>
             </a:fld>
             <a:endParaRPr lang="en-GB"/>
           </a:p>
@@ -11855,7 +11247,7 @@
           <a:p>
             <a:fld id="{78B7688D-A8DB-4F29-8933-5197E215CAB4}" type="datetime1">
               <a:rPr lang="en-GB" smtClean="0"/>
-              <a:t>16/10/2025</a:t>
+              <a:t>24/10/2025</a:t>
             </a:fld>
             <a:endParaRPr lang="en-GB"/>
           </a:p>
@@ -12034,7 +11426,7 @@
           <a:p>
             <a:fld id="{568DD26D-53E9-4B0A-82DD-E320CE5DB387}" type="datetime1">
               <a:rPr lang="en-GB" smtClean="0"/>
-              <a:t>16/10/2025</a:t>
+              <a:t>24/10/2025</a:t>
             </a:fld>
             <a:endParaRPr lang="en-GB" dirty="0"/>
           </a:p>
@@ -12228,7 +11620,7 @@
           <a:p>
             <a:fld id="{C7C05D2C-BD15-49D3-9CFD-524456171BC3}" type="datetime1">
               <a:rPr lang="en-GB" smtClean="0"/>
-              <a:t>16/10/2025</a:t>
+              <a:t>24/10/2025</a:t>
             </a:fld>
             <a:endParaRPr lang="en-GB" dirty="0"/>
           </a:p>
@@ -12508,7 +11900,7 @@
           <a:p>
             <a:fld id="{C253D521-DAE9-4273-B02B-517ADBE95ADE}" type="datetime1">
               <a:rPr lang="en-GB" smtClean="0"/>
-              <a:t>16/10/2025</a:t>
+              <a:t>24/10/2025</a:t>
             </a:fld>
             <a:endParaRPr lang="en-GB" dirty="0"/>
           </a:p>
@@ -12789,7 +12181,7 @@
           <a:p>
             <a:fld id="{78AB5826-BEE2-45C6-9764-C15A939A56F1}" type="datetime1">
               <a:rPr lang="en-GB" smtClean="0"/>
-              <a:t>16/10/2025</a:t>
+              <a:t>24/10/2025</a:t>
             </a:fld>
             <a:endParaRPr lang="en-GB" dirty="0"/>
           </a:p>
@@ -13069,7 +12461,7 @@
           <a:p>
             <a:fld id="{46D4065F-3461-422F-ADF2-C5E46AB7660A}" type="datetime1">
               <a:rPr lang="en-GB" smtClean="0"/>
-              <a:t>16/10/2025</a:t>
+              <a:t>24/10/2025</a:t>
             </a:fld>
             <a:endParaRPr lang="en-GB" dirty="0"/>
           </a:p>
@@ -13545,7 +12937,7 @@
           <a:p>
             <a:fld id="{0A51B3F2-99CF-4B38-92A9-D778481859B9}" type="datetime1">
               <a:rPr lang="en-GB" smtClean="0"/>
-              <a:t>16/10/2025</a:t>
+              <a:t>24/10/2025</a:t>
             </a:fld>
             <a:endParaRPr lang="en-GB" dirty="0"/>
           </a:p>
@@ -13825,7 +13217,7 @@
           <a:p>
             <a:fld id="{7337D3B9-C701-4DDA-9E3B-9063CFCE1FE3}" type="datetime1">
               <a:rPr lang="en-GB" smtClean="0"/>
-              <a:t>16/10/2025</a:t>
+              <a:t>24/10/2025</a:t>
             </a:fld>
             <a:endParaRPr lang="en-GB" dirty="0"/>
           </a:p>
@@ -14105,7 +13497,7 @@
           <a:p>
             <a:fld id="{F30669BC-1E6C-456F-9CA0-8C943D622990}" type="datetime1">
               <a:rPr lang="en-GB" smtClean="0"/>
-              <a:t>16/10/2025</a:t>
+              <a:t>24/10/2025</a:t>
             </a:fld>
             <a:endParaRPr lang="en-GB" dirty="0"/>
           </a:p>
@@ -14369,7 +13761,7 @@
           <a:p>
             <a:fld id="{B2F6866C-8E19-471A-9A6F-4C602756F1BE}" type="datetime1">
               <a:rPr lang="en-GB" smtClean="0"/>
-              <a:t>16/10/2025</a:t>
+              <a:t>24/10/2025</a:t>
             </a:fld>
             <a:endParaRPr lang="en-GB"/>
           </a:p>
@@ -14757,7 +14149,7 @@
           <a:p>
             <a:fld id="{28580FE4-FE19-4D27-B8DB-8640016E371F}" type="datetime1">
               <a:rPr lang="en-GB" smtClean="0"/>
-              <a:t>16/10/2025</a:t>
+              <a:t>24/10/2025</a:t>
             </a:fld>
             <a:endParaRPr lang="en-GB"/>
           </a:p>
@@ -15139,7 +14531,7 @@
           <a:p>
             <a:fld id="{5A8C8F83-EE5B-4025-9D10-F448FDC50D0F}" type="datetime1">
               <a:rPr lang="en-GB" smtClean="0"/>
-              <a:t>16/10/2025</a:t>
+              <a:t>24/10/2025</a:t>
             </a:fld>
             <a:endParaRPr lang="en-GB"/>
           </a:p>
@@ -15511,7 +14903,7 @@
           <a:p>
             <a:fld id="{428E635D-757E-46F7-95E1-EAB1541A0A2C}" type="datetime1">
               <a:rPr lang="en-GB" smtClean="0"/>
-              <a:t>16/10/2025</a:t>
+              <a:t>24/10/2025</a:t>
             </a:fld>
             <a:endParaRPr lang="en-GB"/>
           </a:p>
@@ -15918,7 +15310,7 @@
           <a:p>
             <a:fld id="{06AAFD94-ADD6-4AE6-B350-670FB6E913BF}" type="datetime1">
               <a:rPr lang="en-GB" smtClean="0"/>
-              <a:t>16/10/2025</a:t>
+              <a:t>24/10/2025</a:t>
             </a:fld>
             <a:endParaRPr lang="en-GB"/>
           </a:p>
@@ -16327,7 +15719,7 @@
           <a:p>
             <a:fld id="{AE44F9FF-0E64-435C-949E-AD1A43BD3775}" type="datetime1">
               <a:rPr lang="en-GB" smtClean="0"/>
-              <a:t>16/10/2025</a:t>
+              <a:t>24/10/2025</a:t>
             </a:fld>
             <a:endParaRPr lang="en-GB"/>
           </a:p>
@@ -16726,7 +16118,7 @@
           <a:p>
             <a:fld id="{501CB022-060A-4526-8B10-446AE09B5D04}" type="datetime1">
               <a:rPr lang="en-GB" smtClean="0"/>
-              <a:t>16/10/2025</a:t>
+              <a:t>24/10/2025</a:t>
             </a:fld>
             <a:endParaRPr lang="en-GB"/>
           </a:p>
@@ -17524,7 +16916,7 @@
           <a:p>
             <a:fld id="{27A19B55-A832-449A-80EA-F39FE39FAC92}" type="datetime1">
               <a:rPr lang="en-GB" smtClean="0"/>
-              <a:t>16/10/2025</a:t>
+              <a:t>24/10/2025</a:t>
             </a:fld>
             <a:endParaRPr lang="en-GB"/>
           </a:p>
@@ -18128,7 +17520,7 @@
           <a:p>
             <a:fld id="{67962411-75DB-4901-9DEA-DFA44055B622}" type="datetime1">
               <a:rPr lang="en-GB" smtClean="0"/>
-              <a:t>16/10/2025</a:t>
+              <a:t>24/10/2025</a:t>
             </a:fld>
             <a:endParaRPr lang="en-GB"/>
           </a:p>
@@ -18722,7 +18114,7 @@
           <a:p>
             <a:fld id="{44718053-350F-43F2-8587-0DFE4F77979D}" type="datetime1">
               <a:rPr lang="en-GB" smtClean="0"/>
-              <a:t>16/10/2025</a:t>
+              <a:t>24/10/2025</a:t>
             </a:fld>
             <a:endParaRPr lang="en-GB"/>
           </a:p>
@@ -19059,7 +18451,7 @@
           <a:p>
             <a:fld id="{98EAD178-8353-4240-A873-6C4203DAD423}" type="datetime1">
               <a:rPr lang="en-GB" smtClean="0"/>
-              <a:t>16/10/2025</a:t>
+              <a:t>24/10/2025</a:t>
             </a:fld>
             <a:endParaRPr lang="en-GB"/>
           </a:p>
@@ -19398,7 +18790,7 @@
           <a:p>
             <a:fld id="{718CE987-E859-4E8A-A836-1BA2C4CFA032}" type="datetime1">
               <a:rPr lang="en-GB" smtClean="0"/>
-              <a:t>16/10/2025</a:t>
+              <a:t>24/10/2025</a:t>
             </a:fld>
             <a:endParaRPr lang="en-GB"/>
           </a:p>
@@ -19727,7 +19119,7 @@
           <a:p>
             <a:fld id="{D993A7F3-6028-4606-8533-AC5952F11625}" type="datetime1">
               <a:rPr lang="en-GB" smtClean="0"/>
-              <a:t>16/10/2025</a:t>
+              <a:t>24/10/2025</a:t>
             </a:fld>
             <a:endParaRPr lang="en-GB"/>
           </a:p>
@@ -20064,7 +19456,7 @@
           <a:p>
             <a:fld id="{0EE3FF68-F82B-417B-ACC9-A2050BEBACED}" type="datetime1">
               <a:rPr lang="en-GB" smtClean="0"/>
-              <a:t>16/10/2025</a:t>
+              <a:t>24/10/2025</a:t>
             </a:fld>
             <a:endParaRPr lang="en-GB"/>
           </a:p>
@@ -20403,7 +19795,7 @@
           <a:p>
             <a:fld id="{AF760619-BA02-4EED-AD43-EBD4CD5AF3CA}" type="datetime1">
               <a:rPr lang="en-GB" smtClean="0"/>
-              <a:t>16/10/2025</a:t>
+              <a:t>24/10/2025</a:t>
             </a:fld>
             <a:endParaRPr lang="en-GB"/>
           </a:p>
@@ -20732,7 +20124,7 @@
           <a:p>
             <a:fld id="{32190DEC-A2EA-46FF-85E5-B66ECBC25D96}" type="datetime1">
               <a:rPr lang="en-GB" smtClean="0"/>
-              <a:t>16/10/2025</a:t>
+              <a:t>24/10/2025</a:t>
             </a:fld>
             <a:endParaRPr lang="en-GB"/>
           </a:p>
@@ -20970,7 +20362,7 @@
           <a:p>
             <a:fld id="{98554488-E073-4628-8790-5E7014105AD0}" type="datetime1">
               <a:rPr lang="en-GB" smtClean="0"/>
-              <a:t>16/10/2025</a:t>
+              <a:t>24/10/2025</a:t>
             </a:fld>
             <a:endParaRPr lang="en-GB"/>
           </a:p>
@@ -21406,7 +20798,7 @@
           <a:p>
             <a:fld id="{59BBD372-E042-4E6A-96E2-6865830247CB}" type="datetime1">
               <a:rPr lang="en-GB" smtClean="0"/>
-              <a:t>16/10/2025</a:t>
+              <a:t>24/10/2025</a:t>
             </a:fld>
             <a:endParaRPr lang="en-GB"/>
           </a:p>
@@ -21944,7 +21336,7 @@
           <a:p>
             <a:fld id="{1EE33CFB-924C-487D-AE6C-F81279D83EA2}" type="datetime1">
               <a:rPr lang="en-GB" smtClean="0"/>
-              <a:t>16/10/2025</a:t>
+              <a:t>24/10/2025</a:t>
             </a:fld>
             <a:endParaRPr lang="en-GB"/>
           </a:p>
@@ -22223,7 +21615,7 @@
           <a:p>
             <a:fld id="{4C872EF4-9550-4286-8C2F-D49A9A76E881}" type="datetime1">
               <a:rPr lang="en-GB" smtClean="0"/>
-              <a:t>16/10/2025</a:t>
+              <a:t>24/10/2025</a:t>
             </a:fld>
             <a:endParaRPr lang="en-GB"/>
           </a:p>
@@ -22508,7 +21900,7 @@
           <a:p>
             <a:fld id="{C9077BD5-B19C-4C78-8A76-FC75812C6D12}" type="datetime1">
               <a:rPr lang="en-GB" smtClean="0"/>
-              <a:t>16/10/2025</a:t>
+              <a:t>24/10/2025</a:t>
             </a:fld>
             <a:endParaRPr lang="en-GB"/>
           </a:p>
@@ -22801,7 +22193,7 @@
           <a:p>
             <a:fld id="{575C80E1-0151-4332-A139-266FE14E3417}" type="datetime1">
               <a:rPr lang="en-GB" smtClean="0"/>
-              <a:t>16/10/2025</a:t>
+              <a:t>24/10/2025</a:t>
             </a:fld>
             <a:endParaRPr lang="en-GB"/>
           </a:p>
@@ -23218,7 +22610,7 @@
           <a:p>
             <a:fld id="{A8EE03A6-590E-402F-8243-84D04E2AE911}" type="datetime1">
               <a:rPr lang="en-GB" smtClean="0"/>
-              <a:t>16/10/2025</a:t>
+              <a:t>24/10/2025</a:t>
             </a:fld>
             <a:endParaRPr lang="en-GB" dirty="0"/>
           </a:p>
@@ -23961,7 +23353,7 @@
           <a:p>
             <a:fld id="{0156C9D6-CCC8-4C93-8206-D666BC0C800E}" type="datetime1">
               <a:rPr lang="en-GB" smtClean="0"/>
-              <a:t>16/10/2025</a:t>
+              <a:t>24/10/2025</a:t>
             </a:fld>
             <a:endParaRPr lang="en-GB"/>
           </a:p>
@@ -24381,7 +23773,7 @@
           <a:p>
             <a:fld id="{3F7CC4F1-9494-4582-89C0-8D3DE1858EB6}" type="datetime1">
               <a:rPr lang="en-GB" smtClean="0"/>
-              <a:t>16/10/2025</a:t>
+              <a:t>24/10/2025</a:t>
             </a:fld>
             <a:endParaRPr lang="en-GB"/>
           </a:p>
@@ -24658,7 +24050,7 @@
           <a:p>
             <a:fld id="{011815E1-ADD4-470B-AA6D-22E0A718DE40}" type="datetime1">
               <a:rPr lang="en-GB" smtClean="0"/>
-              <a:t>16/10/2025</a:t>
+              <a:t>24/10/2025</a:t>
             </a:fld>
             <a:endParaRPr lang="en-GB"/>
           </a:p>
@@ -25055,7 +24447,7 @@
           <a:p>
             <a:fld id="{6C7FEAF4-026C-4759-8CFC-51678F4DE5A5}" type="datetime1">
               <a:rPr lang="en-GB" smtClean="0"/>
-              <a:t>16/10/2025</a:t>
+              <a:t>24/10/2025</a:t>
             </a:fld>
             <a:endParaRPr lang="en-GB"/>
           </a:p>
@@ -25436,7 +24828,7 @@
           <a:p>
             <a:fld id="{2297CB8F-070E-4606-83FB-105F77630E87}" type="datetime1">
               <a:rPr lang="en-GB" smtClean="0"/>
-              <a:t>16/10/2025</a:t>
+              <a:t>24/10/2025</a:t>
             </a:fld>
             <a:endParaRPr lang="en-GB"/>
           </a:p>
@@ -25795,7 +25187,7 @@
           <a:p>
             <a:fld id="{EBF86E5E-B37E-4F74-9F64-BD35F8CF7A2D}" type="datetime1">
               <a:rPr lang="en-GB" smtClean="0"/>
-              <a:t>16/10/2025</a:t>
+              <a:t>24/10/2025</a:t>
             </a:fld>
             <a:endParaRPr lang="en-GB"/>
           </a:p>
@@ -26041,7 +25433,7 @@
           <a:p>
             <a:fld id="{7E726CE0-46F5-4560-9D20-17E6DF12D51A}" type="datetime1">
               <a:rPr lang="en-GB" smtClean="0"/>
-              <a:t>16/10/2025</a:t>
+              <a:t>24/10/2025</a:t>
             </a:fld>
             <a:endParaRPr lang="en-GB" dirty="0"/>
           </a:p>
@@ -26233,7 +25625,7 @@
           <a:p>
             <a:fld id="{EBF86E5E-B37E-4F74-9F64-BD35F8CF7A2D}" type="datetime1">
               <a:rPr lang="en-GB" smtClean="0"/>
-              <a:t>16/10/2025</a:t>
+              <a:t>24/10/2025</a:t>
             </a:fld>
             <a:endParaRPr lang="en-GB"/>
           </a:p>
@@ -26510,7 +25902,7 @@
           <a:p>
             <a:fld id="{EBF86E5E-B37E-4F74-9F64-BD35F8CF7A2D}" type="datetime1">
               <a:rPr lang="en-GB" smtClean="0"/>
-              <a:t>16/10/2025</a:t>
+              <a:t>24/10/2025</a:t>
             </a:fld>
             <a:endParaRPr lang="en-GB"/>
           </a:p>
@@ -26833,7 +26225,7 @@
           <a:p>
             <a:fld id="{EBF86E5E-B37E-4F74-9F64-BD35F8CF7A2D}" type="datetime1">
               <a:rPr lang="en-GB" smtClean="0"/>
-              <a:t>16/10/2025</a:t>
+              <a:t>24/10/2025</a:t>
             </a:fld>
             <a:endParaRPr lang="en-GB"/>
           </a:p>
@@ -27384,7 +26776,7 @@
           <a:p>
             <a:fld id="{03CDD438-17AF-4711-9197-AAD3CB5FF7AD}" type="datetime1">
               <a:rPr lang="en-GB" smtClean="0"/>
-              <a:t>16/10/2025</a:t>
+              <a:t>24/10/2025</a:t>
             </a:fld>
             <a:endParaRPr lang="en-GB"/>
           </a:p>
@@ -27554,7 +26946,7 @@
           <a:p>
             <a:fld id="{EBF86E5E-B37E-4F74-9F64-BD35F8CF7A2D}" type="datetime1">
               <a:rPr lang="en-GB" smtClean="0"/>
-              <a:t>16/10/2025</a:t>
+              <a:t>24/10/2025</a:t>
             </a:fld>
             <a:endParaRPr lang="en-GB"/>
           </a:p>
@@ -27922,7 +27314,7 @@
           <a:p>
             <a:fld id="{EBF86E5E-B37E-4F74-9F64-BD35F8CF7A2D}" type="datetime1">
               <a:rPr lang="en-GB" smtClean="0"/>
-              <a:t>16/10/2025</a:t>
+              <a:t>24/10/2025</a:t>
             </a:fld>
             <a:endParaRPr lang="en-GB"/>
           </a:p>
@@ -28267,7 +27659,7 @@
           <a:p>
             <a:fld id="{EBF86E5E-B37E-4F74-9F64-BD35F8CF7A2D}" type="datetime1">
               <a:rPr lang="en-GB" smtClean="0"/>
-              <a:t>16/10/2025</a:t>
+              <a:t>24/10/2025</a:t>
             </a:fld>
             <a:endParaRPr lang="en-GB"/>
           </a:p>
@@ -28581,7 +27973,7 @@
           <a:p>
             <a:fld id="{EBF86E5E-B37E-4F74-9F64-BD35F8CF7A2D}" type="datetime1">
               <a:rPr lang="en-GB" smtClean="0"/>
-              <a:t>16/10/2025</a:t>
+              <a:t>24/10/2025</a:t>
             </a:fld>
             <a:endParaRPr lang="en-GB"/>
           </a:p>
@@ -28814,7 +28206,7 @@
           <a:p>
             <a:fld id="{EBF86E5E-B37E-4F74-9F64-BD35F8CF7A2D}" type="datetime1">
               <a:rPr lang="en-GB" smtClean="0"/>
-              <a:t>16/10/2025</a:t>
+              <a:t>24/10/2025</a:t>
             </a:fld>
             <a:endParaRPr lang="en-GB"/>
           </a:p>
@@ -29157,7 +28549,7 @@
           <a:p>
             <a:fld id="{EBF86E5E-B37E-4F74-9F64-BD35F8CF7A2D}" type="datetime1">
               <a:rPr lang="en-GB" smtClean="0"/>
-              <a:t>16/10/2025</a:t>
+              <a:t>24/10/2025</a:t>
             </a:fld>
             <a:endParaRPr lang="en-GB"/>
           </a:p>
@@ -29524,7 +28916,7 @@
           <a:p>
             <a:fld id="{EBF86E5E-B37E-4F74-9F64-BD35F8CF7A2D}" type="datetime1">
               <a:rPr lang="en-GB" smtClean="0"/>
-              <a:t>16/10/2025</a:t>
+              <a:t>24/10/2025</a:t>
             </a:fld>
             <a:endParaRPr lang="en-GB"/>
           </a:p>
@@ -29912,7 +29304,7 @@
           <a:p>
             <a:fld id="{EBF86E5E-B37E-4F74-9F64-BD35F8CF7A2D}" type="datetime1">
               <a:rPr lang="en-GB" smtClean="0"/>
-              <a:t>16/10/2025</a:t>
+              <a:t>24/10/2025</a:t>
             </a:fld>
             <a:endParaRPr lang="en-GB"/>
           </a:p>
@@ -30408,7 +29800,7 @@
           <a:p>
             <a:fld id="{EBF86E5E-B37E-4F74-9F64-BD35F8CF7A2D}" type="datetime1">
               <a:rPr lang="en-GB" smtClean="0"/>
-              <a:t>16/10/2025</a:t>
+              <a:t>24/10/2025</a:t>
             </a:fld>
             <a:endParaRPr lang="en-GB"/>
           </a:p>
@@ -30675,7 +30067,7 @@
           <a:p>
             <a:fld id="{EBF86E5E-B37E-4F74-9F64-BD35F8CF7A2D}" type="datetime1">
               <a:rPr lang="en-GB" smtClean="0"/>
-              <a:t>16/10/2025</a:t>
+              <a:t>24/10/2025</a:t>
             </a:fld>
             <a:endParaRPr lang="en-GB"/>
           </a:p>
@@ -31247,7 +30639,7 @@
           <a:p>
             <a:fld id="{1FC8AFE5-B5B8-44C3-88EE-9DCF7FE84B48}" type="datetime1">
               <a:rPr lang="en-GB" smtClean="0"/>
-              <a:t>16/10/2025</a:t>
+              <a:t>24/10/2025</a:t>
             </a:fld>
             <a:endParaRPr lang="en-GB"/>
           </a:p>
@@ -31417,7 +30809,7 @@
           <a:p>
             <a:fld id="{EBF86E5E-B37E-4F74-9F64-BD35F8CF7A2D}" type="datetime1">
               <a:rPr lang="en-GB" smtClean="0"/>
-              <a:t>16/10/2025</a:t>
+              <a:t>24/10/2025</a:t>
             </a:fld>
             <a:endParaRPr lang="en-GB"/>
           </a:p>
@@ -31704,7 +31096,7 @@
           <a:p>
             <a:fld id="{EBF86E5E-B37E-4F74-9F64-BD35F8CF7A2D}" type="datetime1">
               <a:rPr lang="en-GB" smtClean="0"/>
-              <a:t>16/10/2025</a:t>
+              <a:t>24/10/2025</a:t>
             </a:fld>
             <a:endParaRPr lang="en-GB"/>
           </a:p>
@@ -32067,7 +31459,7 @@
           <a:p>
             <a:fld id="{EBF86E5E-B37E-4F74-9F64-BD35F8CF7A2D}" type="datetime1">
               <a:rPr lang="en-GB" smtClean="0"/>
-              <a:t>16/10/2025</a:t>
+              <a:t>24/10/2025</a:t>
             </a:fld>
             <a:endParaRPr lang="en-GB"/>
           </a:p>
@@ -32399,7 +31791,7 @@
           <a:p>
             <a:fld id="{EBF86E5E-B37E-4F74-9F64-BD35F8CF7A2D}" type="datetime1">
               <a:rPr lang="en-GB" smtClean="0"/>
-              <a:t>16/10/2025</a:t>
+              <a:t>24/10/2025</a:t>
             </a:fld>
             <a:endParaRPr lang="en-GB"/>
           </a:p>
@@ -32738,7 +32130,7 @@
           <a:p>
             <a:fld id="{F0BF9B1A-B6F2-42EB-8E1B-5799D3EC8AC9}" type="datetime1">
               <a:rPr lang="en-GB" smtClean="0"/>
-              <a:t>16/10/2025</a:t>
+              <a:t>24/10/2025</a:t>
             </a:fld>
             <a:endParaRPr lang="en-GB"/>
           </a:p>
@@ -32906,23 +32298,25 @@
             </a:pPr>
             <a:r>
               <a:rPr lang="en-GB" sz="2800" dirty="0"/>
-              <a:t>The link is </a:t>
-            </a:r>
-            <a:r>
-              <a:rPr lang="en-GB" sz="2800" b="0" i="0" u="sng" dirty="0">
+              <a:t>The link </a:t>
+            </a:r>
+            <a:r>
+              <a:rPr lang="en-GB" sz="2800"/>
+              <a:t>is </a:t>
+            </a:r>
+            <a:r>
+              <a:rPr lang="en-GB" sz="2800" u="sng">
                 <a:solidFill>
                   <a:srgbClr val="0563C1"/>
                 </a:solidFill>
-                <a:effectLst/>
                 <a:hlinkClick r:id="rId3"/>
               </a:rPr>
-              <a:t>https://tinyurl.com/feedback-rcds</a:t>
-            </a:r>
-            <a:endParaRPr lang="en-GB" sz="2800" b="0" i="0" u="sng" dirty="0">
+              <a:t>https://ecri.short.gy/feedback-rcds</a:t>
+            </a:r>
+            <a:endParaRPr lang="en-GB" sz="2800" u="sng">
               <a:solidFill>
                 <a:srgbClr val="0563C1"/>
               </a:solidFill>
-              <a:effectLst/>
             </a:endParaRPr>
           </a:p>
           <a:p>
@@ -32931,8 +32325,12 @@
               <a:buChar char="•"/>
             </a:pPr>
             <a:r>
+              <a:rPr lang="en-GB" sz="2800"/>
+              <a:t>You </a:t>
+            </a:r>
+            <a:r>
               <a:rPr lang="en-GB" sz="2800" dirty="0"/>
-              <a:t>You should also have received an email with this link</a:t>
+              <a:t>should also have received an email with this link</a:t>
             </a:r>
           </a:p>
           <a:p>
@@ -33427,7 +32825,7 @@
           <a:p>
             <a:fld id="{2F2266BD-A0E6-40F1-8F71-434068B66D46}" type="datetime1">
               <a:rPr lang="en-GB" smtClean="0"/>
-              <a:t>16/10/2025</a:t>
+              <a:t>24/10/2025</a:t>
             </a:fld>
             <a:endParaRPr lang="en-GB" dirty="0"/>
           </a:p>
@@ -33633,7 +33031,7 @@
           <a:p>
             <a:fld id="{2B1D3025-9EE9-41F3-9AF7-98DB0E778CD9}" type="datetime1">
               <a:rPr lang="en-GB" smtClean="0"/>
-              <a:t>16/10/2025</a:t>
+              <a:t>24/10/2025</a:t>
             </a:fld>
             <a:endParaRPr lang="en-GB"/>
           </a:p>
@@ -33980,7 +33378,7 @@
           <a:p>
             <a:fld id="{09010ACD-0F86-4ABE-9CEE-A8B6FB7B88BE}" type="datetime1">
               <a:rPr lang="en-GB" smtClean="0"/>
-              <a:t>16/10/2025</a:t>
+              <a:t>24/10/2025</a:t>
             </a:fld>
             <a:endParaRPr lang="en-GB"/>
           </a:p>
@@ -34305,7 +33703,7 @@
           <a:p>
             <a:fld id="{D1F25C0E-EE98-4C01-AFA7-DC56C1876BB1}" type="datetime1">
               <a:rPr lang="en-GB" smtClean="0"/>
-              <a:t>16/10/2025</a:t>
+              <a:t>24/10/2025</a:t>
             </a:fld>
             <a:endParaRPr lang="en-GB"/>
           </a:p>
@@ -34587,7 +33985,7 @@
           <a:p>
             <a:fld id="{1F887192-F519-4EA6-81C8-6C41CCD48964}" type="datetime1">
               <a:rPr lang="en-GB" smtClean="0"/>
-              <a:t>16/10/2025</a:t>
+              <a:t>24/10/2025</a:t>
             </a:fld>
             <a:endParaRPr lang="en-GB"/>
           </a:p>
@@ -34912,7 +34310,7 @@
           <a:p>
             <a:fld id="{0C3C25EF-6A9A-4684-8CA3-C8E3CFD90510}" type="datetime1">
               <a:rPr lang="en-GB" smtClean="0"/>
-              <a:t>16/10/2025</a:t>
+              <a:t>24/10/2025</a:t>
             </a:fld>
             <a:endParaRPr lang="en-GB"/>
           </a:p>

--- a/Managing and Running Python Effectively.pptx
+++ b/Managing and Running Python Effectively.pptx
@@ -5,7 +5,7 @@
     <p:sldMasterId id="2147483648" r:id="rId1"/>
   </p:sldMasterIdLst>
   <p:notesMasterIdLst>
-    <p:notesMasterId r:id="rId38"/>
+    <p:notesMasterId r:id="rId37"/>
   </p:notesMasterIdLst>
   <p:sldIdLst>
     <p:sldId id="325" r:id="rId2"/>
@@ -42,8 +42,7 @@
     <p:sldId id="436" r:id="rId33"/>
     <p:sldId id="437" r:id="rId34"/>
     <p:sldId id="359" r:id="rId35"/>
-    <p:sldId id="406" r:id="rId36"/>
-    <p:sldId id="279" r:id="rId37"/>
+    <p:sldId id="279" r:id="rId36"/>
   </p:sldIdLst>
   <p:sldSz cx="12192000" cy="6858000"/>
   <p:notesSz cx="6858000" cy="9144000"/>
@@ -176,8 +175,8 @@
 <pc:chgInfo xmlns:a="http://schemas.openxmlformats.org/drawingml/2006/main" xmlns:r="http://schemas.openxmlformats.org/officeDocument/2006/relationships" xmlns:ac="http://schemas.microsoft.com/office/drawing/2013/main/command" xmlns:pc="http://schemas.microsoft.com/office/powerpoint/2013/main/command">
   <pc:docChgLst>
     <pc:chgData name="Cooling, Chris" userId="6dcf99c9-2ba5-410a-8445-0893a3d1421f" providerId="ADAL" clId="{C7FF6125-292A-4FB5-8ECD-9E76613B45E0}"/>
-    <pc:docChg chg="modSld">
-      <pc:chgData name="Cooling, Chris" userId="6dcf99c9-2ba5-410a-8445-0893a3d1421f" providerId="ADAL" clId="{C7FF6125-292A-4FB5-8ECD-9E76613B45E0}" dt="2025-10-24T08:52:02.294" v="1" actId="20577"/>
+    <pc:docChg chg="delSld modSld">
+      <pc:chgData name="Cooling, Chris" userId="6dcf99c9-2ba5-410a-8445-0893a3d1421f" providerId="ADAL" clId="{C7FF6125-292A-4FB5-8ECD-9E76613B45E0}" dt="2025-10-24T10:07:23.247" v="2" actId="47"/>
       <pc:docMkLst>
         <pc:docMk/>
       </pc:docMkLst>
@@ -195,6 +194,13 @@
             <ac:spMk id="6" creationId="{F67B57BE-29B8-B7BA-15CB-930F83F6EB26}"/>
           </ac:spMkLst>
         </pc:spChg>
+      </pc:sldChg>
+      <pc:sldChg chg="del">
+        <pc:chgData name="Cooling, Chris" userId="6dcf99c9-2ba5-410a-8445-0893a3d1421f" providerId="ADAL" clId="{C7FF6125-292A-4FB5-8ECD-9E76613B45E0}" dt="2025-10-24T10:07:23.247" v="2" actId="47"/>
+        <pc:sldMkLst>
+          <pc:docMk/>
+          <pc:sldMk cId="3543295302" sldId="406"/>
+        </pc:sldMkLst>
       </pc:sldChg>
     </pc:docChg>
   </pc:docChgLst>
@@ -4018,97 +4024,6 @@
     <p:extLst>
       <p:ext uri="{BB962C8B-B14F-4D97-AF65-F5344CB8AC3E}">
         <p14:creationId xmlns:p14="http://schemas.microsoft.com/office/powerpoint/2010/main" val="328910392"/>
-      </p:ext>
-    </p:extLst>
-  </p:cSld>
-  <p:clrMapOvr>
-    <a:masterClrMapping/>
-  </p:clrMapOvr>
-</p:notes>
-</file>
-
-<file path=ppt/notesSlides/notesSlide31.xml><?xml version="1.0" encoding="utf-8"?>
-<p:notes xmlns:a="http://schemas.openxmlformats.org/drawingml/2006/main" xmlns:r="http://schemas.openxmlformats.org/officeDocument/2006/relationships" xmlns:p="http://schemas.openxmlformats.org/presentationml/2006/main">
-  <p:cSld>
-    <p:spTree>
-      <p:nvGrpSpPr>
-        <p:cNvPr id="1" name=""/>
-        <p:cNvGrpSpPr/>
-        <p:nvPr/>
-      </p:nvGrpSpPr>
-      <p:grpSpPr>
-        <a:xfrm>
-          <a:off x="0" y="0"/>
-          <a:ext cx="0" cy="0"/>
-          <a:chOff x="0" y="0"/>
-          <a:chExt cx="0" cy="0"/>
-        </a:xfrm>
-      </p:grpSpPr>
-      <p:sp>
-        <p:nvSpPr>
-          <p:cNvPr id="2" name="Slide Image Placeholder 1"/>
-          <p:cNvSpPr>
-            <a:spLocks noGrp="1" noRot="1" noChangeAspect="1"/>
-          </p:cNvSpPr>
-          <p:nvPr>
-            <p:ph type="sldImg"/>
-          </p:nvPr>
-        </p:nvSpPr>
-        <p:spPr/>
-      </p:sp>
-      <p:sp>
-        <p:nvSpPr>
-          <p:cNvPr id="3" name="Notes Placeholder 2"/>
-          <p:cNvSpPr>
-            <a:spLocks noGrp="1"/>
-          </p:cNvSpPr>
-          <p:nvPr>
-            <p:ph type="body" idx="1"/>
-          </p:nvPr>
-        </p:nvSpPr>
-        <p:spPr/>
-        <p:txBody>
-          <a:bodyPr/>
-          <a:lstStyle/>
-          <a:p>
-            <a:r>
-              <a:rPr lang="en-GB" dirty="0"/>
-              <a:t>Remove after </a:t>
-            </a:r>
-            <a:r>
-              <a:rPr lang="en-GB"/>
-              <a:t>PRES closes</a:t>
-            </a:r>
-          </a:p>
-        </p:txBody>
-      </p:sp>
-      <p:sp>
-        <p:nvSpPr>
-          <p:cNvPr id="4" name="Slide Number Placeholder 3"/>
-          <p:cNvSpPr>
-            <a:spLocks noGrp="1"/>
-          </p:cNvSpPr>
-          <p:nvPr>
-            <p:ph type="sldNum" sz="quarter" idx="5"/>
-          </p:nvPr>
-        </p:nvSpPr>
-        <p:spPr/>
-        <p:txBody>
-          <a:bodyPr/>
-          <a:lstStyle/>
-          <a:p>
-            <a:fld id="{877663E2-27CE-4C79-91D3-7F5C4262D57F}" type="slidenum">
-              <a:rPr lang="en-US" smtClean="0"/>
-              <a:t>35</a:t>
-            </a:fld>
-            <a:endParaRPr lang="en-US"/>
-          </a:p>
-        </p:txBody>
-      </p:sp>
-    </p:spTree>
-    <p:extLst>
-      <p:ext uri="{BB962C8B-B14F-4D97-AF65-F5344CB8AC3E}">
-        <p14:creationId xmlns:p14="http://schemas.microsoft.com/office/powerpoint/2010/main" val="2593689646"/>
       </p:ext>
     </p:extLst>
   </p:cSld>
@@ -32401,282 +32316,6 @@
 </file>
 
 <file path=ppt/slides/slide35.xml><?xml version="1.0" encoding="utf-8"?>
-<p:sld xmlns:a="http://schemas.openxmlformats.org/drawingml/2006/main" xmlns:r="http://schemas.openxmlformats.org/officeDocument/2006/relationships" xmlns:p="http://schemas.openxmlformats.org/presentationml/2006/main">
-  <p:cSld>
-    <p:spTree>
-      <p:nvGrpSpPr>
-        <p:cNvPr id="1" name=""/>
-        <p:cNvGrpSpPr/>
-        <p:nvPr/>
-      </p:nvGrpSpPr>
-      <p:grpSpPr>
-        <a:xfrm>
-          <a:off x="0" y="0"/>
-          <a:ext cx="0" cy="0"/>
-          <a:chOff x="0" y="0"/>
-          <a:chExt cx="0" cy="0"/>
-        </a:xfrm>
-      </p:grpSpPr>
-      <p:sp>
-        <p:nvSpPr>
-          <p:cNvPr id="2" name="Title 1">
-            <a:extLst>
-              <a:ext uri="{FF2B5EF4-FFF2-40B4-BE49-F238E27FC236}">
-                <a16:creationId xmlns:a16="http://schemas.microsoft.com/office/drawing/2014/main" id="{E1AC92A0-DAFD-2CE4-F5BD-315A0135CDD6}"/>
-              </a:ext>
-            </a:extLst>
-          </p:cNvPr>
-          <p:cNvSpPr>
-            <a:spLocks noGrp="1"/>
-          </p:cNvSpPr>
-          <p:nvPr>
-            <p:ph type="ctrTitle"/>
-          </p:nvPr>
-        </p:nvSpPr>
-        <p:spPr>
-          <a:xfrm>
-            <a:off x="330200" y="1864819"/>
-            <a:ext cx="4742772" cy="1828800"/>
-          </a:xfrm>
-        </p:spPr>
-        <p:txBody>
-          <a:bodyPr/>
-          <a:lstStyle/>
-          <a:p>
-            <a:r>
-              <a:rPr lang="en-US" dirty="0">
-                <a:solidFill>
-                  <a:srgbClr val="98FB98"/>
-                </a:solidFill>
-              </a:rPr>
-              <a:t>PRES 2025</a:t>
-            </a:r>
-          </a:p>
-        </p:txBody>
-      </p:sp>
-      <p:sp>
-        <p:nvSpPr>
-          <p:cNvPr id="3" name="Text Placeholder 2">
-            <a:extLst>
-              <a:ext uri="{FF2B5EF4-FFF2-40B4-BE49-F238E27FC236}">
-                <a16:creationId xmlns:a16="http://schemas.microsoft.com/office/drawing/2014/main" id="{0B6972F5-B010-8428-D0AA-F619C83E71DE}"/>
-              </a:ext>
-            </a:extLst>
-          </p:cNvPr>
-          <p:cNvSpPr>
-            <a:spLocks noGrp="1"/>
-          </p:cNvSpPr>
-          <p:nvPr>
-            <p:ph type="body" sz="quarter" idx="4294967295"/>
-          </p:nvPr>
-        </p:nvSpPr>
-        <p:spPr>
-          <a:xfrm>
-            <a:off x="330200" y="5878513"/>
-            <a:ext cx="5606257" cy="652463"/>
-          </a:xfrm>
-        </p:spPr>
-        <p:txBody>
-          <a:bodyPr/>
-          <a:lstStyle/>
-          <a:p>
-            <a:r>
-              <a:rPr lang="en-US" dirty="0"/>
-              <a:t>Presentation Title</a:t>
-            </a:r>
-          </a:p>
-          <a:p>
-            <a:r>
-              <a:rPr lang="en-US" dirty="0"/>
-              <a:t>DD/MM/YYYY</a:t>
-            </a:r>
-          </a:p>
-        </p:txBody>
-      </p:sp>
-      <p:pic>
-        <p:nvPicPr>
-          <p:cNvPr id="4" name="Picture 3">
-            <a:extLst>
-              <a:ext uri="{FF2B5EF4-FFF2-40B4-BE49-F238E27FC236}">
-                <a16:creationId xmlns:a16="http://schemas.microsoft.com/office/drawing/2014/main" id="{A18BDFF0-9D53-5DAB-3700-2938EAF96CEE}"/>
-              </a:ext>
-            </a:extLst>
-          </p:cNvPr>
-          <p:cNvPicPr>
-            <a:picLocks noChangeAspect="1"/>
-          </p:cNvPicPr>
-          <p:nvPr/>
-        </p:nvPicPr>
-        <p:blipFill>
-          <a:blip r:embed="rId3" cstate="print">
-            <a:extLst>
-              <a:ext uri="{28A0092B-C50C-407E-A947-70E740481C1C}">
-                <a14:useLocalDpi xmlns:a14="http://schemas.microsoft.com/office/drawing/2010/main" val="0"/>
-              </a:ext>
-            </a:extLst>
-          </a:blip>
-          <a:stretch>
-            <a:fillRect/>
-          </a:stretch>
-        </p:blipFill>
-        <p:spPr>
-          <a:xfrm>
-            <a:off x="9169653" y="417970"/>
-            <a:ext cx="2448272" cy="1446849"/>
-          </a:xfrm>
-          <a:prstGeom prst="rect">
-            <a:avLst/>
-          </a:prstGeom>
-          <a:solidFill>
-            <a:srgbClr val="98FB98"/>
-          </a:solidFill>
-          <a:effectLst>
-            <a:outerShdw blurRad="50800" dist="50800" dir="5400000" algn="ctr" rotWithShape="0">
-              <a:srgbClr val="98FB98"/>
-            </a:outerShdw>
-          </a:effectLst>
-        </p:spPr>
-      </p:pic>
-      <p:sp>
-        <p:nvSpPr>
-          <p:cNvPr id="6" name="Title 1">
-            <a:extLst>
-              <a:ext uri="{FF2B5EF4-FFF2-40B4-BE49-F238E27FC236}">
-                <a16:creationId xmlns:a16="http://schemas.microsoft.com/office/drawing/2014/main" id="{0742163F-282C-50FB-3BC2-3BC83316980D}"/>
-              </a:ext>
-            </a:extLst>
-          </p:cNvPr>
-          <p:cNvSpPr txBox="1">
-            <a:spLocks/>
-          </p:cNvSpPr>
-          <p:nvPr/>
-        </p:nvSpPr>
-        <p:spPr>
-          <a:xfrm>
-            <a:off x="399472" y="4079052"/>
-            <a:ext cx="11376891" cy="1828800"/>
-          </a:xfrm>
-          <a:prstGeom prst="rect">
-            <a:avLst/>
-          </a:prstGeom>
-        </p:spPr>
-        <p:txBody>
-          <a:bodyPr vert="horz" lIns="0" tIns="0" rIns="0" bIns="0" rtlCol="0" anchor="t">
-            <a:noAutofit/>
-          </a:bodyPr>
-          <a:lstStyle>
-            <a:lvl1pPr algn="l" defTabSz="685765" rtl="0" eaLnBrk="1" latinLnBrk="0" hangingPunct="1">
-              <a:lnSpc>
-                <a:spcPct val="90000"/>
-              </a:lnSpc>
-              <a:spcBef>
-                <a:spcPct val="0"/>
-              </a:spcBef>
-              <a:buNone/>
-              <a:defRPr sz="6400" b="1" kern="1200">
-                <a:solidFill>
-                  <a:srgbClr val="98FB98"/>
-                </a:solidFill>
-                <a:latin typeface="+mj-lt"/>
-                <a:ea typeface="+mj-ea"/>
-                <a:cs typeface="+mj-cs"/>
-              </a:defRPr>
-            </a:lvl1pPr>
-          </a:lstStyle>
-          <a:p>
-            <a:pPr marL="342900" indent="-342900">
-              <a:lnSpc>
-                <a:spcPct val="100000"/>
-              </a:lnSpc>
-              <a:buFont typeface="Arial" panose="020B0604020202020204" pitchFamily="34" charset="0"/>
-              <a:buChar char="•"/>
-            </a:pPr>
-            <a:r>
-              <a:rPr lang="en-US" sz="2000" dirty="0"/>
-              <a:t>Coming in 2025 - PRES is a national survey for research degree students</a:t>
-            </a:r>
-          </a:p>
-          <a:p>
-            <a:pPr marL="342900" indent="-342900">
-              <a:lnSpc>
-                <a:spcPct val="100000"/>
-              </a:lnSpc>
-              <a:buFont typeface="Arial" panose="020B0604020202020204" pitchFamily="34" charset="0"/>
-              <a:buChar char="•"/>
-            </a:pPr>
-            <a:endParaRPr lang="en-US" sz="2000" dirty="0"/>
-          </a:p>
-          <a:p>
-            <a:pPr marL="342900" indent="-342900">
-              <a:lnSpc>
-                <a:spcPct val="100000"/>
-              </a:lnSpc>
-              <a:buFont typeface="Arial" panose="020B0604020202020204" pitchFamily="34" charset="0"/>
-              <a:buChar char="•"/>
-            </a:pPr>
-            <a:r>
-              <a:rPr lang="en-US" sz="2000" dirty="0"/>
-              <a:t>Find out more about the action we have taken in response to the previous PRES: </a:t>
-            </a:r>
-          </a:p>
-          <a:p>
-            <a:pPr marL="342900" indent="-342900">
-              <a:lnSpc>
-                <a:spcPct val="100000"/>
-              </a:lnSpc>
-              <a:buFont typeface="Arial" panose="020B0604020202020204" pitchFamily="34" charset="0"/>
-              <a:buChar char="•"/>
-            </a:pPr>
-            <a:endParaRPr lang="en-US" sz="2000" dirty="0"/>
-          </a:p>
-          <a:p>
-            <a:pPr marL="342900" indent="-342900">
-              <a:lnSpc>
-                <a:spcPct val="100000"/>
-              </a:lnSpc>
-              <a:buFont typeface="Arial" panose="020B0604020202020204" pitchFamily="34" charset="0"/>
-              <a:buChar char="•"/>
-            </a:pPr>
-            <a:r>
-              <a:rPr lang="en-US" sz="2000" dirty="0">
-                <a:solidFill>
-                  <a:srgbClr val="EE82EE"/>
-                </a:solidFill>
-                <a:hlinkClick r:id="rId4">
-                  <a:extLst>
-                    <a:ext uri="{A12FA001-AC4F-418D-AE19-62706E023703}">
-                      <ahyp:hlinkClr xmlns:ahyp="http://schemas.microsoft.com/office/drawing/2018/hyperlinkcolor" val="tx"/>
-                    </a:ext>
-                  </a:extLst>
-                </a:hlinkClick>
-              </a:rPr>
-              <a:t>Postgraduate Research Experience Survey (PRES) | Current students | Imperial College London</a:t>
-            </a:r>
-            <a:endParaRPr lang="en-US" sz="2000" dirty="0">
-              <a:solidFill>
-                <a:srgbClr val="EE82EE"/>
-              </a:solidFill>
-            </a:endParaRPr>
-          </a:p>
-        </p:txBody>
-      </p:sp>
-    </p:spTree>
-    <p:extLst>
-      <p:ext uri="{BB962C8B-B14F-4D97-AF65-F5344CB8AC3E}">
-        <p14:creationId xmlns:p14="http://schemas.microsoft.com/office/powerpoint/2010/main" val="3543295302"/>
-      </p:ext>
-    </p:extLst>
-  </p:cSld>
-  <p:clrMapOvr>
-    <a:masterClrMapping/>
-  </p:clrMapOvr>
-  <p:transition>
-    <p:fade/>
-  </p:transition>
-</p:sld>
-</file>
-
-<file path=ppt/slides/slide36.xml><?xml version="1.0" encoding="utf-8"?>
 <p:sld xmlns:a="http://schemas.openxmlformats.org/drawingml/2006/main" xmlns:r="http://schemas.openxmlformats.org/officeDocument/2006/relationships" xmlns:p="http://schemas.openxmlformats.org/presentationml/2006/main">
   <p:cSld>
     <p:spTree>

--- a/Managing and Running Python Effectively.pptx
+++ b/Managing and Running Python Effectively.pptx
@@ -166,13 +166,37 @@
 <file path=ppt/revisionInfo.xml><?xml version="1.0" encoding="utf-8"?>
 <p1510:revInfo xmlns:a="http://schemas.openxmlformats.org/drawingml/2006/main" xmlns:r="http://schemas.openxmlformats.org/officeDocument/2006/relationships" xmlns:p1510="http://schemas.microsoft.com/office/powerpoint/2015/10/main">
   <p1510:revLst>
-    <p1510:client id="{C7FF6125-292A-4FB5-8ECD-9E76613B45E0}" v="2" dt="2025-10-24T08:52:02.299"/>
+    <p1510:client id="{C7FF6125-292A-4FB5-8ECD-9E76613B45E0}" v="5" dt="2025-10-30T15:19:30.247"/>
   </p1510:revLst>
 </p1510:revInfo>
 </file>
 
 <file path=ppt/changesInfos/changesInfo1.xml><?xml version="1.0" encoding="utf-8"?>
 <pc:chgInfo xmlns:a="http://schemas.openxmlformats.org/drawingml/2006/main" xmlns:r="http://schemas.openxmlformats.org/officeDocument/2006/relationships" xmlns:ac="http://schemas.microsoft.com/office/drawing/2013/main/command" xmlns:pc="http://schemas.microsoft.com/office/powerpoint/2013/main/command">
+  <pc:docChgLst>
+    <pc:chgData name="Cooling, Chris" userId="6dcf99c9-2ba5-410a-8445-0893a3d1421f" providerId="ADAL" clId="{0564427D-CD1D-4B33-9C97-2A8069F97102}"/>
+    <pc:docChg chg="modSld">
+      <pc:chgData name="Cooling, Chris" userId="6dcf99c9-2ba5-410a-8445-0893a3d1421f" providerId="ADAL" clId="{0564427D-CD1D-4B33-9C97-2A8069F97102}" dt="2025-10-30T15:18:42.974" v="12" actId="20577"/>
+      <pc:docMkLst>
+        <pc:docMk/>
+      </pc:docMkLst>
+      <pc:sldChg chg="modSp mod">
+        <pc:chgData name="Cooling, Chris" userId="6dcf99c9-2ba5-410a-8445-0893a3d1421f" providerId="ADAL" clId="{0564427D-CD1D-4B33-9C97-2A8069F97102}" dt="2025-10-30T15:18:42.974" v="12" actId="20577"/>
+        <pc:sldMkLst>
+          <pc:docMk/>
+          <pc:sldMk cId="3556050136" sldId="436"/>
+        </pc:sldMkLst>
+        <pc:spChg chg="mod">
+          <ac:chgData name="Cooling, Chris" userId="6dcf99c9-2ba5-410a-8445-0893a3d1421f" providerId="ADAL" clId="{0564427D-CD1D-4B33-9C97-2A8069F97102}" dt="2025-10-30T15:18:42.974" v="12" actId="20577"/>
+          <ac:spMkLst>
+            <pc:docMk/>
+            <pc:sldMk cId="3556050136" sldId="436"/>
+            <ac:spMk id="3" creationId="{AE72B19A-BAEF-7DAE-DDC1-54394DA86691}"/>
+          </ac:spMkLst>
+        </pc:spChg>
+      </pc:sldChg>
+    </pc:docChg>
+  </pc:docChgLst>
   <pc:docChgLst>
     <pc:chgData name="Cooling, Chris" userId="6dcf99c9-2ba5-410a-8445-0893a3d1421f" providerId="ADAL" clId="{C7FF6125-292A-4FB5-8ECD-9E76613B45E0}"/>
     <pc:docChg chg="delSld modSld">
@@ -550,7 +574,7 @@
           <a:p>
             <a:fld id="{D2E0D2A8-8F95-47C2-ABE1-A779F5A43C98}" type="datetimeFigureOut">
               <a:rPr lang="en-US" smtClean="0"/>
-              <a:t>10/24/2025</a:t>
+              <a:t>10/30/2025</a:t>
             </a:fld>
             <a:endParaRPr lang="en-US"/>
           </a:p>
@@ -5254,7 +5278,7 @@
           <a:p>
             <a:fld id="{3C856526-9870-44E3-9BF4-D7E9F048CE19}" type="datetime1">
               <a:rPr lang="en-GB" smtClean="0"/>
-              <a:t>24/10/2025</a:t>
+              <a:t>30/10/2025</a:t>
             </a:fld>
             <a:endParaRPr lang="en-GB"/>
           </a:p>
@@ -5580,7 +5604,7 @@
           <a:p>
             <a:fld id="{E2715DC3-E7CE-491C-B0F8-9FB0C1A9D971}" type="datetime1">
               <a:rPr lang="en-GB" smtClean="0"/>
-              <a:t>24/10/2025</a:t>
+              <a:t>30/10/2025</a:t>
             </a:fld>
             <a:endParaRPr lang="en-GB"/>
           </a:p>
@@ -5908,7 +5932,7 @@
           <a:p>
             <a:fld id="{3E12C797-3D51-4532-86C6-808DD4FA685E}" type="datetime1">
               <a:rPr lang="en-GB" smtClean="0"/>
-              <a:t>24/10/2025</a:t>
+              <a:t>30/10/2025</a:t>
             </a:fld>
             <a:endParaRPr lang="en-GB"/>
           </a:p>
@@ -6284,7 +6308,7 @@
           <a:p>
             <a:fld id="{27C69686-0FBF-4501-81F5-40C710430EB0}" type="datetime1">
               <a:rPr lang="en-GB" smtClean="0"/>
-              <a:t>24/10/2025</a:t>
+              <a:t>30/10/2025</a:t>
             </a:fld>
             <a:endParaRPr lang="en-GB"/>
           </a:p>
@@ -6668,7 +6692,7 @@
           <a:p>
             <a:fld id="{07F43393-4ECE-48F4-84E5-60E541CE8671}" type="datetime1">
               <a:rPr lang="en-GB" smtClean="0"/>
-              <a:t>24/10/2025</a:t>
+              <a:t>30/10/2025</a:t>
             </a:fld>
             <a:endParaRPr lang="en-GB"/>
           </a:p>
@@ -7054,7 +7078,7 @@
           <a:p>
             <a:fld id="{67519201-7190-4B7A-8C0C-58AEE0DC7430}" type="datetime1">
               <a:rPr lang="en-GB" smtClean="0"/>
-              <a:t>24/10/2025</a:t>
+              <a:t>30/10/2025</a:t>
             </a:fld>
             <a:endParaRPr lang="en-GB"/>
           </a:p>
@@ -7282,7 +7306,7 @@
           <a:p>
             <a:fld id="{10623FC2-6830-4AE1-A246-5A56A4647077}" type="datetime1">
               <a:rPr lang="en-GB" smtClean="0"/>
-              <a:t>24/10/2025</a:t>
+              <a:t>30/10/2025</a:t>
             </a:fld>
             <a:endParaRPr lang="en-GB"/>
           </a:p>
@@ -7780,7 +7804,7 @@
           <a:p>
             <a:fld id="{E8511495-6DAD-496D-8110-FBBD835BD3A9}" type="datetime1">
               <a:rPr lang="en-GB" smtClean="0"/>
-              <a:t>24/10/2025</a:t>
+              <a:t>30/10/2025</a:t>
             </a:fld>
             <a:endParaRPr lang="en-GB"/>
           </a:p>
@@ -8280,7 +8304,7 @@
           <a:p>
             <a:fld id="{7C843B13-6A48-423F-B4AB-E1AF9D3CF21B}" type="datetime1">
               <a:rPr lang="en-GB" smtClean="0"/>
-              <a:t>24/10/2025</a:t>
+              <a:t>30/10/2025</a:t>
             </a:fld>
             <a:endParaRPr lang="en-GB"/>
           </a:p>
@@ -8770,7 +8794,7 @@
           <a:p>
             <a:fld id="{56A83211-21A1-4A01-BFDD-83E69FB2A09E}" type="datetime1">
               <a:rPr lang="en-GB" smtClean="0"/>
-              <a:t>24/10/2025</a:t>
+              <a:t>30/10/2025</a:t>
             </a:fld>
             <a:endParaRPr lang="en-GB"/>
           </a:p>
@@ -9581,7 +9605,7 @@
           <a:p>
             <a:fld id="{4DB54F66-C1A0-4CAE-8B60-BA02AB871479}" type="datetime1">
               <a:rPr lang="en-GB" smtClean="0"/>
-              <a:t>24/10/2025</a:t>
+              <a:t>30/10/2025</a:t>
             </a:fld>
             <a:endParaRPr lang="en-GB"/>
           </a:p>
@@ -10198,7 +10222,7 @@
           <a:p>
             <a:fld id="{62D94E9C-946A-434F-8C97-5DAB74C4AB63}" type="datetime1">
               <a:rPr lang="en-GB" smtClean="0"/>
-              <a:t>24/10/2025</a:t>
+              <a:t>30/10/2025</a:t>
             </a:fld>
             <a:endParaRPr lang="en-GB"/>
           </a:p>
@@ -10818,7 +10842,7 @@
           <a:p>
             <a:fld id="{72C46D22-C71B-464B-B075-EE6B5090E8AB}" type="datetime1">
               <a:rPr lang="en-GB" smtClean="0"/>
-              <a:t>24/10/2025</a:t>
+              <a:t>30/10/2025</a:t>
             </a:fld>
             <a:endParaRPr lang="en-GB"/>
           </a:p>
@@ -10989,7 +11013,7 @@
           <a:p>
             <a:fld id="{209E91A2-C31B-4762-B78F-5DF8A7B35BC5}" type="datetime1">
               <a:rPr lang="en-GB" smtClean="0"/>
-              <a:t>24/10/2025</a:t>
+              <a:t>30/10/2025</a:t>
             </a:fld>
             <a:endParaRPr lang="en-GB"/>
           </a:p>
@@ -11162,7 +11186,7 @@
           <a:p>
             <a:fld id="{78B7688D-A8DB-4F29-8933-5197E215CAB4}" type="datetime1">
               <a:rPr lang="en-GB" smtClean="0"/>
-              <a:t>24/10/2025</a:t>
+              <a:t>30/10/2025</a:t>
             </a:fld>
             <a:endParaRPr lang="en-GB"/>
           </a:p>
@@ -11341,7 +11365,7 @@
           <a:p>
             <a:fld id="{568DD26D-53E9-4B0A-82DD-E320CE5DB387}" type="datetime1">
               <a:rPr lang="en-GB" smtClean="0"/>
-              <a:t>24/10/2025</a:t>
+              <a:t>30/10/2025</a:t>
             </a:fld>
             <a:endParaRPr lang="en-GB" dirty="0"/>
           </a:p>
@@ -11535,7 +11559,7 @@
           <a:p>
             <a:fld id="{C7C05D2C-BD15-49D3-9CFD-524456171BC3}" type="datetime1">
               <a:rPr lang="en-GB" smtClean="0"/>
-              <a:t>24/10/2025</a:t>
+              <a:t>30/10/2025</a:t>
             </a:fld>
             <a:endParaRPr lang="en-GB" dirty="0"/>
           </a:p>
@@ -11815,7 +11839,7 @@
           <a:p>
             <a:fld id="{C253D521-DAE9-4273-B02B-517ADBE95ADE}" type="datetime1">
               <a:rPr lang="en-GB" smtClean="0"/>
-              <a:t>24/10/2025</a:t>
+              <a:t>30/10/2025</a:t>
             </a:fld>
             <a:endParaRPr lang="en-GB" dirty="0"/>
           </a:p>
@@ -12096,7 +12120,7 @@
           <a:p>
             <a:fld id="{78AB5826-BEE2-45C6-9764-C15A939A56F1}" type="datetime1">
               <a:rPr lang="en-GB" smtClean="0"/>
-              <a:t>24/10/2025</a:t>
+              <a:t>30/10/2025</a:t>
             </a:fld>
             <a:endParaRPr lang="en-GB" dirty="0"/>
           </a:p>
@@ -12376,7 +12400,7 @@
           <a:p>
             <a:fld id="{46D4065F-3461-422F-ADF2-C5E46AB7660A}" type="datetime1">
               <a:rPr lang="en-GB" smtClean="0"/>
-              <a:t>24/10/2025</a:t>
+              <a:t>30/10/2025</a:t>
             </a:fld>
             <a:endParaRPr lang="en-GB" dirty="0"/>
           </a:p>
@@ -12852,7 +12876,7 @@
           <a:p>
             <a:fld id="{0A51B3F2-99CF-4B38-92A9-D778481859B9}" type="datetime1">
               <a:rPr lang="en-GB" smtClean="0"/>
-              <a:t>24/10/2025</a:t>
+              <a:t>30/10/2025</a:t>
             </a:fld>
             <a:endParaRPr lang="en-GB" dirty="0"/>
           </a:p>
@@ -13132,7 +13156,7 @@
           <a:p>
             <a:fld id="{7337D3B9-C701-4DDA-9E3B-9063CFCE1FE3}" type="datetime1">
               <a:rPr lang="en-GB" smtClean="0"/>
-              <a:t>24/10/2025</a:t>
+              <a:t>30/10/2025</a:t>
             </a:fld>
             <a:endParaRPr lang="en-GB" dirty="0"/>
           </a:p>
@@ -13412,7 +13436,7 @@
           <a:p>
             <a:fld id="{F30669BC-1E6C-456F-9CA0-8C943D622990}" type="datetime1">
               <a:rPr lang="en-GB" smtClean="0"/>
-              <a:t>24/10/2025</a:t>
+              <a:t>30/10/2025</a:t>
             </a:fld>
             <a:endParaRPr lang="en-GB" dirty="0"/>
           </a:p>
@@ -13676,7 +13700,7 @@
           <a:p>
             <a:fld id="{B2F6866C-8E19-471A-9A6F-4C602756F1BE}" type="datetime1">
               <a:rPr lang="en-GB" smtClean="0"/>
-              <a:t>24/10/2025</a:t>
+              <a:t>30/10/2025</a:t>
             </a:fld>
             <a:endParaRPr lang="en-GB"/>
           </a:p>
@@ -14064,7 +14088,7 @@
           <a:p>
             <a:fld id="{28580FE4-FE19-4D27-B8DB-8640016E371F}" type="datetime1">
               <a:rPr lang="en-GB" smtClean="0"/>
-              <a:t>24/10/2025</a:t>
+              <a:t>30/10/2025</a:t>
             </a:fld>
             <a:endParaRPr lang="en-GB"/>
           </a:p>
@@ -14446,7 +14470,7 @@
           <a:p>
             <a:fld id="{5A8C8F83-EE5B-4025-9D10-F448FDC50D0F}" type="datetime1">
               <a:rPr lang="en-GB" smtClean="0"/>
-              <a:t>24/10/2025</a:t>
+              <a:t>30/10/2025</a:t>
             </a:fld>
             <a:endParaRPr lang="en-GB"/>
           </a:p>
@@ -14818,7 +14842,7 @@
           <a:p>
             <a:fld id="{428E635D-757E-46F7-95E1-EAB1541A0A2C}" type="datetime1">
               <a:rPr lang="en-GB" smtClean="0"/>
-              <a:t>24/10/2025</a:t>
+              <a:t>30/10/2025</a:t>
             </a:fld>
             <a:endParaRPr lang="en-GB"/>
           </a:p>
@@ -15225,7 +15249,7 @@
           <a:p>
             <a:fld id="{06AAFD94-ADD6-4AE6-B350-670FB6E913BF}" type="datetime1">
               <a:rPr lang="en-GB" smtClean="0"/>
-              <a:t>24/10/2025</a:t>
+              <a:t>30/10/2025</a:t>
             </a:fld>
             <a:endParaRPr lang="en-GB"/>
           </a:p>
@@ -15634,7 +15658,7 @@
           <a:p>
             <a:fld id="{AE44F9FF-0E64-435C-949E-AD1A43BD3775}" type="datetime1">
               <a:rPr lang="en-GB" smtClean="0"/>
-              <a:t>24/10/2025</a:t>
+              <a:t>30/10/2025</a:t>
             </a:fld>
             <a:endParaRPr lang="en-GB"/>
           </a:p>
@@ -16033,7 +16057,7 @@
           <a:p>
             <a:fld id="{501CB022-060A-4526-8B10-446AE09B5D04}" type="datetime1">
               <a:rPr lang="en-GB" smtClean="0"/>
-              <a:t>24/10/2025</a:t>
+              <a:t>30/10/2025</a:t>
             </a:fld>
             <a:endParaRPr lang="en-GB"/>
           </a:p>
@@ -16831,7 +16855,7 @@
           <a:p>
             <a:fld id="{27A19B55-A832-449A-80EA-F39FE39FAC92}" type="datetime1">
               <a:rPr lang="en-GB" smtClean="0"/>
-              <a:t>24/10/2025</a:t>
+              <a:t>30/10/2025</a:t>
             </a:fld>
             <a:endParaRPr lang="en-GB"/>
           </a:p>
@@ -17435,7 +17459,7 @@
           <a:p>
             <a:fld id="{67962411-75DB-4901-9DEA-DFA44055B622}" type="datetime1">
               <a:rPr lang="en-GB" smtClean="0"/>
-              <a:t>24/10/2025</a:t>
+              <a:t>30/10/2025</a:t>
             </a:fld>
             <a:endParaRPr lang="en-GB"/>
           </a:p>
@@ -18029,7 +18053,7 @@
           <a:p>
             <a:fld id="{44718053-350F-43F2-8587-0DFE4F77979D}" type="datetime1">
               <a:rPr lang="en-GB" smtClean="0"/>
-              <a:t>24/10/2025</a:t>
+              <a:t>30/10/2025</a:t>
             </a:fld>
             <a:endParaRPr lang="en-GB"/>
           </a:p>
@@ -18366,7 +18390,7 @@
           <a:p>
             <a:fld id="{98EAD178-8353-4240-A873-6C4203DAD423}" type="datetime1">
               <a:rPr lang="en-GB" smtClean="0"/>
-              <a:t>24/10/2025</a:t>
+              <a:t>30/10/2025</a:t>
             </a:fld>
             <a:endParaRPr lang="en-GB"/>
           </a:p>
@@ -18705,7 +18729,7 @@
           <a:p>
             <a:fld id="{718CE987-E859-4E8A-A836-1BA2C4CFA032}" type="datetime1">
               <a:rPr lang="en-GB" smtClean="0"/>
-              <a:t>24/10/2025</a:t>
+              <a:t>30/10/2025</a:t>
             </a:fld>
             <a:endParaRPr lang="en-GB"/>
           </a:p>
@@ -19034,7 +19058,7 @@
           <a:p>
             <a:fld id="{D993A7F3-6028-4606-8533-AC5952F11625}" type="datetime1">
               <a:rPr lang="en-GB" smtClean="0"/>
-              <a:t>24/10/2025</a:t>
+              <a:t>30/10/2025</a:t>
             </a:fld>
             <a:endParaRPr lang="en-GB"/>
           </a:p>
@@ -19371,7 +19395,7 @@
           <a:p>
             <a:fld id="{0EE3FF68-F82B-417B-ACC9-A2050BEBACED}" type="datetime1">
               <a:rPr lang="en-GB" smtClean="0"/>
-              <a:t>24/10/2025</a:t>
+              <a:t>30/10/2025</a:t>
             </a:fld>
             <a:endParaRPr lang="en-GB"/>
           </a:p>
@@ -19710,7 +19734,7 @@
           <a:p>
             <a:fld id="{AF760619-BA02-4EED-AD43-EBD4CD5AF3CA}" type="datetime1">
               <a:rPr lang="en-GB" smtClean="0"/>
-              <a:t>24/10/2025</a:t>
+              <a:t>30/10/2025</a:t>
             </a:fld>
             <a:endParaRPr lang="en-GB"/>
           </a:p>
@@ -20039,7 +20063,7 @@
           <a:p>
             <a:fld id="{32190DEC-A2EA-46FF-85E5-B66ECBC25D96}" type="datetime1">
               <a:rPr lang="en-GB" smtClean="0"/>
-              <a:t>24/10/2025</a:t>
+              <a:t>30/10/2025</a:t>
             </a:fld>
             <a:endParaRPr lang="en-GB"/>
           </a:p>
@@ -20277,7 +20301,7 @@
           <a:p>
             <a:fld id="{98554488-E073-4628-8790-5E7014105AD0}" type="datetime1">
               <a:rPr lang="en-GB" smtClean="0"/>
-              <a:t>24/10/2025</a:t>
+              <a:t>30/10/2025</a:t>
             </a:fld>
             <a:endParaRPr lang="en-GB"/>
           </a:p>
@@ -20713,7 +20737,7 @@
           <a:p>
             <a:fld id="{59BBD372-E042-4E6A-96E2-6865830247CB}" type="datetime1">
               <a:rPr lang="en-GB" smtClean="0"/>
-              <a:t>24/10/2025</a:t>
+              <a:t>30/10/2025</a:t>
             </a:fld>
             <a:endParaRPr lang="en-GB"/>
           </a:p>
@@ -21251,7 +21275,7 @@
           <a:p>
             <a:fld id="{1EE33CFB-924C-487D-AE6C-F81279D83EA2}" type="datetime1">
               <a:rPr lang="en-GB" smtClean="0"/>
-              <a:t>24/10/2025</a:t>
+              <a:t>30/10/2025</a:t>
             </a:fld>
             <a:endParaRPr lang="en-GB"/>
           </a:p>
@@ -21530,7 +21554,7 @@
           <a:p>
             <a:fld id="{4C872EF4-9550-4286-8C2F-D49A9A76E881}" type="datetime1">
               <a:rPr lang="en-GB" smtClean="0"/>
-              <a:t>24/10/2025</a:t>
+              <a:t>30/10/2025</a:t>
             </a:fld>
             <a:endParaRPr lang="en-GB"/>
           </a:p>
@@ -21815,7 +21839,7 @@
           <a:p>
             <a:fld id="{C9077BD5-B19C-4C78-8A76-FC75812C6D12}" type="datetime1">
               <a:rPr lang="en-GB" smtClean="0"/>
-              <a:t>24/10/2025</a:t>
+              <a:t>30/10/2025</a:t>
             </a:fld>
             <a:endParaRPr lang="en-GB"/>
           </a:p>
@@ -22108,7 +22132,7 @@
           <a:p>
             <a:fld id="{575C80E1-0151-4332-A139-266FE14E3417}" type="datetime1">
               <a:rPr lang="en-GB" smtClean="0"/>
-              <a:t>24/10/2025</a:t>
+              <a:t>30/10/2025</a:t>
             </a:fld>
             <a:endParaRPr lang="en-GB"/>
           </a:p>
@@ -22525,7 +22549,7 @@
           <a:p>
             <a:fld id="{A8EE03A6-590E-402F-8243-84D04E2AE911}" type="datetime1">
               <a:rPr lang="en-GB" smtClean="0"/>
-              <a:t>24/10/2025</a:t>
+              <a:t>30/10/2025</a:t>
             </a:fld>
             <a:endParaRPr lang="en-GB" dirty="0"/>
           </a:p>
@@ -23268,7 +23292,7 @@
           <a:p>
             <a:fld id="{0156C9D6-CCC8-4C93-8206-D666BC0C800E}" type="datetime1">
               <a:rPr lang="en-GB" smtClean="0"/>
-              <a:t>24/10/2025</a:t>
+              <a:t>30/10/2025</a:t>
             </a:fld>
             <a:endParaRPr lang="en-GB"/>
           </a:p>
@@ -23688,7 +23712,7 @@
           <a:p>
             <a:fld id="{3F7CC4F1-9494-4582-89C0-8D3DE1858EB6}" type="datetime1">
               <a:rPr lang="en-GB" smtClean="0"/>
-              <a:t>24/10/2025</a:t>
+              <a:t>30/10/2025</a:t>
             </a:fld>
             <a:endParaRPr lang="en-GB"/>
           </a:p>
@@ -23965,7 +23989,7 @@
           <a:p>
             <a:fld id="{011815E1-ADD4-470B-AA6D-22E0A718DE40}" type="datetime1">
               <a:rPr lang="en-GB" smtClean="0"/>
-              <a:t>24/10/2025</a:t>
+              <a:t>30/10/2025</a:t>
             </a:fld>
             <a:endParaRPr lang="en-GB"/>
           </a:p>
@@ -24362,7 +24386,7 @@
           <a:p>
             <a:fld id="{6C7FEAF4-026C-4759-8CFC-51678F4DE5A5}" type="datetime1">
               <a:rPr lang="en-GB" smtClean="0"/>
-              <a:t>24/10/2025</a:t>
+              <a:t>30/10/2025</a:t>
             </a:fld>
             <a:endParaRPr lang="en-GB"/>
           </a:p>
@@ -24743,7 +24767,7 @@
           <a:p>
             <a:fld id="{2297CB8F-070E-4606-83FB-105F77630E87}" type="datetime1">
               <a:rPr lang="en-GB" smtClean="0"/>
-              <a:t>24/10/2025</a:t>
+              <a:t>30/10/2025</a:t>
             </a:fld>
             <a:endParaRPr lang="en-GB"/>
           </a:p>
@@ -25102,7 +25126,7 @@
           <a:p>
             <a:fld id="{EBF86E5E-B37E-4F74-9F64-BD35F8CF7A2D}" type="datetime1">
               <a:rPr lang="en-GB" smtClean="0"/>
-              <a:t>24/10/2025</a:t>
+              <a:t>30/10/2025</a:t>
             </a:fld>
             <a:endParaRPr lang="en-GB"/>
           </a:p>
@@ -25348,7 +25372,7 @@
           <a:p>
             <a:fld id="{7E726CE0-46F5-4560-9D20-17E6DF12D51A}" type="datetime1">
               <a:rPr lang="en-GB" smtClean="0"/>
-              <a:t>24/10/2025</a:t>
+              <a:t>30/10/2025</a:t>
             </a:fld>
             <a:endParaRPr lang="en-GB" dirty="0"/>
           </a:p>
@@ -25540,7 +25564,7 @@
           <a:p>
             <a:fld id="{EBF86E5E-B37E-4F74-9F64-BD35F8CF7A2D}" type="datetime1">
               <a:rPr lang="en-GB" smtClean="0"/>
-              <a:t>24/10/2025</a:t>
+              <a:t>30/10/2025</a:t>
             </a:fld>
             <a:endParaRPr lang="en-GB"/>
           </a:p>
@@ -25817,7 +25841,7 @@
           <a:p>
             <a:fld id="{EBF86E5E-B37E-4F74-9F64-BD35F8CF7A2D}" type="datetime1">
               <a:rPr lang="en-GB" smtClean="0"/>
-              <a:t>24/10/2025</a:t>
+              <a:t>30/10/2025</a:t>
             </a:fld>
             <a:endParaRPr lang="en-GB"/>
           </a:p>
@@ -26140,7 +26164,7 @@
           <a:p>
             <a:fld id="{EBF86E5E-B37E-4F74-9F64-BD35F8CF7A2D}" type="datetime1">
               <a:rPr lang="en-GB" smtClean="0"/>
-              <a:t>24/10/2025</a:t>
+              <a:t>30/10/2025</a:t>
             </a:fld>
             <a:endParaRPr lang="en-GB"/>
           </a:p>
@@ -26691,7 +26715,7 @@
           <a:p>
             <a:fld id="{03CDD438-17AF-4711-9197-AAD3CB5FF7AD}" type="datetime1">
               <a:rPr lang="en-GB" smtClean="0"/>
-              <a:t>24/10/2025</a:t>
+              <a:t>30/10/2025</a:t>
             </a:fld>
             <a:endParaRPr lang="en-GB"/>
           </a:p>
@@ -26861,7 +26885,7 @@
           <a:p>
             <a:fld id="{EBF86E5E-B37E-4F74-9F64-BD35F8CF7A2D}" type="datetime1">
               <a:rPr lang="en-GB" smtClean="0"/>
-              <a:t>24/10/2025</a:t>
+              <a:t>30/10/2025</a:t>
             </a:fld>
             <a:endParaRPr lang="en-GB"/>
           </a:p>
@@ -27229,7 +27253,7 @@
           <a:p>
             <a:fld id="{EBF86E5E-B37E-4F74-9F64-BD35F8CF7A2D}" type="datetime1">
               <a:rPr lang="en-GB" smtClean="0"/>
-              <a:t>24/10/2025</a:t>
+              <a:t>30/10/2025</a:t>
             </a:fld>
             <a:endParaRPr lang="en-GB"/>
           </a:p>
@@ -27574,7 +27598,7 @@
           <a:p>
             <a:fld id="{EBF86E5E-B37E-4F74-9F64-BD35F8CF7A2D}" type="datetime1">
               <a:rPr lang="en-GB" smtClean="0"/>
-              <a:t>24/10/2025</a:t>
+              <a:t>30/10/2025</a:t>
             </a:fld>
             <a:endParaRPr lang="en-GB"/>
           </a:p>
@@ -27888,7 +27912,7 @@
           <a:p>
             <a:fld id="{EBF86E5E-B37E-4F74-9F64-BD35F8CF7A2D}" type="datetime1">
               <a:rPr lang="en-GB" smtClean="0"/>
-              <a:t>24/10/2025</a:t>
+              <a:t>30/10/2025</a:t>
             </a:fld>
             <a:endParaRPr lang="en-GB"/>
           </a:p>
@@ -28121,7 +28145,7 @@
           <a:p>
             <a:fld id="{EBF86E5E-B37E-4F74-9F64-BD35F8CF7A2D}" type="datetime1">
               <a:rPr lang="en-GB" smtClean="0"/>
-              <a:t>24/10/2025</a:t>
+              <a:t>30/10/2025</a:t>
             </a:fld>
             <a:endParaRPr lang="en-GB"/>
           </a:p>
@@ -28464,7 +28488,7 @@
           <a:p>
             <a:fld id="{EBF86E5E-B37E-4F74-9F64-BD35F8CF7A2D}" type="datetime1">
               <a:rPr lang="en-GB" smtClean="0"/>
-              <a:t>24/10/2025</a:t>
+              <a:t>30/10/2025</a:t>
             </a:fld>
             <a:endParaRPr lang="en-GB"/>
           </a:p>
@@ -28831,7 +28855,7 @@
           <a:p>
             <a:fld id="{EBF86E5E-B37E-4F74-9F64-BD35F8CF7A2D}" type="datetime1">
               <a:rPr lang="en-GB" smtClean="0"/>
-              <a:t>24/10/2025</a:t>
+              <a:t>30/10/2025</a:t>
             </a:fld>
             <a:endParaRPr lang="en-GB"/>
           </a:p>
@@ -29219,7 +29243,7 @@
           <a:p>
             <a:fld id="{EBF86E5E-B37E-4F74-9F64-BD35F8CF7A2D}" type="datetime1">
               <a:rPr lang="en-GB" smtClean="0"/>
-              <a:t>24/10/2025</a:t>
+              <a:t>30/10/2025</a:t>
             </a:fld>
             <a:endParaRPr lang="en-GB"/>
           </a:p>
@@ -29715,7 +29739,7 @@
           <a:p>
             <a:fld id="{EBF86E5E-B37E-4F74-9F64-BD35F8CF7A2D}" type="datetime1">
               <a:rPr lang="en-GB" smtClean="0"/>
-              <a:t>24/10/2025</a:t>
+              <a:t>30/10/2025</a:t>
             </a:fld>
             <a:endParaRPr lang="en-GB"/>
           </a:p>
@@ -29982,7 +30006,7 @@
           <a:p>
             <a:fld id="{EBF86E5E-B37E-4F74-9F64-BD35F8CF7A2D}" type="datetime1">
               <a:rPr lang="en-GB" smtClean="0"/>
-              <a:t>24/10/2025</a:t>
+              <a:t>30/10/2025</a:t>
             </a:fld>
             <a:endParaRPr lang="en-GB"/>
           </a:p>
@@ -30554,7 +30578,7 @@
           <a:p>
             <a:fld id="{1FC8AFE5-B5B8-44C3-88EE-9DCF7FE84B48}" type="datetime1">
               <a:rPr lang="en-GB" smtClean="0"/>
-              <a:t>24/10/2025</a:t>
+              <a:t>30/10/2025</a:t>
             </a:fld>
             <a:endParaRPr lang="en-GB"/>
           </a:p>
@@ -30724,7 +30748,7 @@
           <a:p>
             <a:fld id="{EBF86E5E-B37E-4F74-9F64-BD35F8CF7A2D}" type="datetime1">
               <a:rPr lang="en-GB" smtClean="0"/>
-              <a:t>24/10/2025</a:t>
+              <a:t>30/10/2025</a:t>
             </a:fld>
             <a:endParaRPr lang="en-GB"/>
           </a:p>
@@ -31011,7 +31035,7 @@
           <a:p>
             <a:fld id="{EBF86E5E-B37E-4F74-9F64-BD35F8CF7A2D}" type="datetime1">
               <a:rPr lang="en-GB" smtClean="0"/>
-              <a:t>24/10/2025</a:t>
+              <a:t>30/10/2025</a:t>
             </a:fld>
             <a:endParaRPr lang="en-GB"/>
           </a:p>
@@ -31374,7 +31398,7 @@
           <a:p>
             <a:fld id="{EBF86E5E-B37E-4F74-9F64-BD35F8CF7A2D}" type="datetime1">
               <a:rPr lang="en-GB" smtClean="0"/>
-              <a:t>24/10/2025</a:t>
+              <a:t>30/10/2025</a:t>
             </a:fld>
             <a:endParaRPr lang="en-GB"/>
           </a:p>
@@ -31594,7 +31618,7 @@
                 <a:latin typeface="+mj-lt"/>
                 <a:cs typeface="Courier New" panose="02070309020205020404" pitchFamily="49" charset="0"/>
               </a:rPr>
-              <a:t> or you may register for the ECRI course </a:t>
+              <a:t> or you may register for the ECRI courses </a:t>
             </a:r>
             <a:r>
               <a:rPr lang="en-GB" sz="2600" dirty="0">
@@ -31604,10 +31628,28 @@
               </a:rPr>
               <a:t>here</a:t>
             </a:r>
-            <a:endParaRPr lang="en-GB" sz="2600" dirty="0">
-              <a:latin typeface="+mj-lt"/>
-              <a:cs typeface="Courier New" panose="02070309020205020404" pitchFamily="49" charset="0"/>
-            </a:endParaRPr>
+            <a:r>
+              <a:rPr lang="en-GB" sz="2600" dirty="0">
+                <a:latin typeface="+mj-lt"/>
+                <a:cs typeface="Courier New" panose="02070309020205020404" pitchFamily="49" charset="0"/>
+              </a:rPr>
+              <a:t> and </a:t>
+            </a:r>
+            <a:r>
+              <a:rPr lang="en-GB" sz="2600" dirty="0">
+                <a:latin typeface="+mj-lt"/>
+                <a:cs typeface="Courier New" panose="02070309020205020404" pitchFamily="49" charset="0"/>
+                <a:hlinkClick r:id="rId6"/>
+              </a:rPr>
+              <a:t>here</a:t>
+            </a:r>
+            <a:r>
+              <a:rPr lang="en-GB" sz="2600" dirty="0">
+                <a:latin typeface="+mj-lt"/>
+                <a:cs typeface="Courier New" panose="02070309020205020404" pitchFamily="49" charset="0"/>
+              </a:rPr>
+              <a:t>.</a:t>
+            </a:r>
           </a:p>
         </p:txBody>
       </p:sp>
@@ -31706,7 +31748,7 @@
           <a:p>
             <a:fld id="{EBF86E5E-B37E-4F74-9F64-BD35F8CF7A2D}" type="datetime1">
               <a:rPr lang="en-GB" smtClean="0"/>
-              <a:t>24/10/2025</a:t>
+              <a:t>30/10/2025</a:t>
             </a:fld>
             <a:endParaRPr lang="en-GB"/>
           </a:p>
@@ -31934,7 +31976,15 @@
                 <a:cs typeface="Courier New" panose="02070309020205020404" pitchFamily="49" charset="0"/>
                 <a:hlinkClick r:id="rId5"/>
               </a:rPr>
-              <a:t>course on containers</a:t>
+              <a:t>course on </a:t>
+            </a:r>
+            <a:r>
+              <a:rPr lang="en-GB" sz="2600" dirty="0">
+                <a:latin typeface="+mj-lt"/>
+                <a:cs typeface="Courier New" panose="02070309020205020404" pitchFamily="49" charset="0"/>
+                <a:hlinkClick r:id="rId6"/>
+              </a:rPr>
+              <a:t>containers</a:t>
             </a:r>
             <a:endParaRPr lang="en-GB" sz="2600" dirty="0">
               <a:latin typeface="+mj-lt"/>
@@ -32045,7 +32095,7 @@
           <a:p>
             <a:fld id="{F0BF9B1A-B6F2-42EB-8E1B-5799D3EC8AC9}" type="datetime1">
               <a:rPr lang="en-GB" smtClean="0"/>
-              <a:t>24/10/2025</a:t>
+              <a:t>30/10/2025</a:t>
             </a:fld>
             <a:endParaRPr lang="en-GB"/>
           </a:p>
@@ -32464,7 +32514,7 @@
           <a:p>
             <a:fld id="{2F2266BD-A0E6-40F1-8F71-434068B66D46}" type="datetime1">
               <a:rPr lang="en-GB" smtClean="0"/>
-              <a:t>24/10/2025</a:t>
+              <a:t>30/10/2025</a:t>
             </a:fld>
             <a:endParaRPr lang="en-GB" dirty="0"/>
           </a:p>
@@ -32670,7 +32720,7 @@
           <a:p>
             <a:fld id="{2B1D3025-9EE9-41F3-9AF7-98DB0E778CD9}" type="datetime1">
               <a:rPr lang="en-GB" smtClean="0"/>
-              <a:t>24/10/2025</a:t>
+              <a:t>30/10/2025</a:t>
             </a:fld>
             <a:endParaRPr lang="en-GB"/>
           </a:p>
@@ -33017,7 +33067,7 @@
           <a:p>
             <a:fld id="{09010ACD-0F86-4ABE-9CEE-A8B6FB7B88BE}" type="datetime1">
               <a:rPr lang="en-GB" smtClean="0"/>
-              <a:t>24/10/2025</a:t>
+              <a:t>30/10/2025</a:t>
             </a:fld>
             <a:endParaRPr lang="en-GB"/>
           </a:p>
@@ -33342,7 +33392,7 @@
           <a:p>
             <a:fld id="{D1F25C0E-EE98-4C01-AFA7-DC56C1876BB1}" type="datetime1">
               <a:rPr lang="en-GB" smtClean="0"/>
-              <a:t>24/10/2025</a:t>
+              <a:t>30/10/2025</a:t>
             </a:fld>
             <a:endParaRPr lang="en-GB"/>
           </a:p>
@@ -33624,7 +33674,7 @@
           <a:p>
             <a:fld id="{1F887192-F519-4EA6-81C8-6C41CCD48964}" type="datetime1">
               <a:rPr lang="en-GB" smtClean="0"/>
-              <a:t>24/10/2025</a:t>
+              <a:t>30/10/2025</a:t>
             </a:fld>
             <a:endParaRPr lang="en-GB"/>
           </a:p>
@@ -33949,7 +33999,7 @@
           <a:p>
             <a:fld id="{0C3C25EF-6A9A-4684-8CA3-C8E3CFD90510}" type="datetime1">
               <a:rPr lang="en-GB" smtClean="0"/>
-              <a:t>24/10/2025</a:t>
+              <a:t>30/10/2025</a:t>
             </a:fld>
             <a:endParaRPr lang="en-GB"/>
           </a:p>
